--- a/cours/Module TIC/Département Anglais/ENS 2ème année/Cours_TIC_ENS_2eme_annee_EN.pptx
+++ b/cours/Module TIC/Département Anglais/ENS 2ème année/Cours_TIC_ENS_2eme_annee_EN.pptx
@@ -15,8 +15,13 @@
     <p:sldId id="263" r:id="rId14"/>
     <p:sldId id="264" r:id="rId15"/>
     <p:sldId id="265" r:id="rId16"/>
+    <p:sldId id="266" r:id="rId17"/>
+    <p:sldId id="267" r:id="rId18"/>
+    <p:sldId id="268" r:id="rId19"/>
+    <p:sldId id="269" r:id="rId20"/>
+    <p:sldId id="270" r:id="rId21"/>
   </p:sldIdLst>
-  <p:sldSz cx="12191695" cy="6858000" type="screen4x3"/>
+  <p:sldSz cx="9144000" cy="6858000" type="screen4x3"/>
   <p:notesSz cx="6858000" cy="9144000"/>
   <p:defaultTextStyle>
     <a:defPPr>
@@ -3090,6 +3095,14 @@
 <file path=ppt/slides/slide1.xml><?xml version="1.0" encoding="utf-8"?>
 <p:sld xmlns:a="http://schemas.openxmlformats.org/drawingml/2006/main" xmlns:p="http://schemas.openxmlformats.org/presentationml/2006/main" xmlns:r="http://schemas.openxmlformats.org/officeDocument/2006/relationships">
   <p:cSld>
+    <p:bg>
+      <p:bgPr>
+        <a:solidFill>
+          <a:srgbClr val="1A5C33"/>
+        </a:solidFill>
+        <a:effectLst/>
+      </p:bgPr>
+    </p:bg>
     <p:spTree>
       <p:nvGrpSpPr>
         <p:cNvPr id="1" name=""/>
@@ -3099,56 +3112,14 @@
       <p:grpSpPr/>
       <p:sp>
         <p:nvSpPr>
-          <p:cNvPr id="2" name="Title 1"/>
-          <p:cNvSpPr>
-            <a:spLocks noGrp="1"/>
-          </p:cNvSpPr>
-          <p:nvPr>
-            <p:ph type="ctrTitle"/>
-          </p:nvPr>
-        </p:nvSpPr>
-        <p:spPr/>
-        <p:txBody>
-          <a:bodyPr/>
-          <a:lstStyle/>
-          <a:p>
-            <a:r>
-              <a:t>ICT — ENS Year 2 — English Department</a:t>
-            </a:r>
-          </a:p>
-        </p:txBody>
-      </p:sp>
-      <p:sp>
-        <p:nvSpPr>
-          <p:cNvPr id="3" name="Subtitle 2"/>
-          <p:cNvSpPr>
-            <a:spLocks noGrp="1"/>
-          </p:cNvSpPr>
-          <p:nvPr>
-            <p:ph type="subTitle" idx="1"/>
-          </p:nvPr>
-        </p:nvSpPr>
-        <p:spPr/>
-        <p:txBody>
-          <a:bodyPr/>
-          <a:lstStyle/>
-          <a:p>
-            <a:r>
-              <a:t>Sequences &amp; placement | 1h30 | BELACEL Madani</a:t>
-            </a:r>
-          </a:p>
-        </p:txBody>
-      </p:sp>
-      <p:sp>
-        <p:nvSpPr>
-          <p:cNvPr id="4" name="TextBox 3"/>
+          <p:cNvPr id="2" name="TextBox 1"/>
           <p:cNvSpPr txBox="1"/>
           <p:nvPr/>
         </p:nvSpPr>
         <p:spPr>
           <a:xfrm>
-            <a:off x="365760" y="6446520"/>
-            <a:ext cx="8412480" cy="320040"/>
+            <a:off x="731520" y="1371600"/>
+            <a:ext cx="7680960" cy="1371600"/>
           </a:xfrm>
           <a:prstGeom prst="rect">
             <a:avLst/>
@@ -3156,20 +3127,90 @@
           <a:noFill/>
         </p:spPr>
         <p:txBody>
-          <a:bodyPr wrap="none">
+          <a:bodyPr wrap="square">
             <a:spAutoFit/>
           </a:bodyPr>
           <a:lstStyle/>
           <a:p>
             <a:pPr algn="ctr">
-              <a:defRPr sz="900">
-                <a:solidFill>
-                  <a:srgbClr val="404040"/>
-                </a:solidFill>
-              </a:defRPr>
-            </a:pPr>
-            <a:r>
-              <a:t>ICT — ENS Year 2 — English Department  •  Diapositive 1/10</a:t>
+              <a:defRPr sz="3200" b="1">
+                <a:solidFill>
+                  <a:srgbClr val="FFFFFF"/>
+                </a:solidFill>
+              </a:defRPr>
+            </a:pPr>
+            <a:r>
+              <a:t>ICT Course 01 — Introduction to ICT (ENS)</a:t>
+            </a:r>
+          </a:p>
+        </p:txBody>
+      </p:sp>
+      <p:sp>
+        <p:nvSpPr>
+          <p:cNvPr id="3" name="TextBox 2"/>
+          <p:cNvSpPr txBox="1"/>
+          <p:nvPr/>
+        </p:nvSpPr>
+        <p:spPr>
+          <a:xfrm>
+            <a:off x="731520" y="2926080"/>
+            <a:ext cx="7680960" cy="548640"/>
+          </a:xfrm>
+          <a:prstGeom prst="rect">
+            <a:avLst/>
+          </a:prstGeom>
+          <a:noFill/>
+        </p:spPr>
+        <p:txBody>
+          <a:bodyPr wrap="square">
+            <a:spAutoFit/>
+          </a:bodyPr>
+          <a:lstStyle/>
+          <a:p>
+            <a:pPr algn="ctr">
+              <a:defRPr sz="2000" b="0">
+                <a:solidFill>
+                  <a:srgbClr val="C5D9C7"/>
+                </a:solidFill>
+              </a:defRPr>
+            </a:pPr>
+            <a:r>
+              <a:t>Module TIC — Dr. BELACEL Madani</a:t>
+            </a:r>
+          </a:p>
+        </p:txBody>
+      </p:sp>
+      <p:sp>
+        <p:nvSpPr>
+          <p:cNvPr id="4" name="TextBox 3"/>
+          <p:cNvSpPr txBox="1"/>
+          <p:nvPr/>
+        </p:nvSpPr>
+        <p:spPr>
+          <a:xfrm>
+            <a:off x="731520" y="3657600"/>
+            <a:ext cx="7680960" cy="457200"/>
+          </a:xfrm>
+          <a:prstGeom prst="rect">
+            <a:avLst/>
+          </a:prstGeom>
+          <a:noFill/>
+        </p:spPr>
+        <p:txBody>
+          <a:bodyPr wrap="square">
+            <a:spAutoFit/>
+          </a:bodyPr>
+          <a:lstStyle/>
+          <a:p>
+            <a:pPr algn="ctr">
+              <a:defRPr sz="1600" b="0">
+                <a:solidFill>
+                  <a:srgbClr val="A0CFA0"/>
+                </a:solidFill>
+              </a:defRPr>
+            </a:pPr>
+            <a:r>
+              <a:t>Université de Mostaganem — MCB</a:t>
             </a:r>
           </a:p>
         </p:txBody>
@@ -3179,15 +3220,20 @@
   <p:clrMapOvr>
     <a:masterClrMapping/>
   </p:clrMapOvr>
-  <p:transition spd="med">
-    <p:fade/>
-  </p:transition>
 </p:sld>
 </file>
 
 <file path=ppt/slides/slide10.xml><?xml version="1.0" encoding="utf-8"?>
 <p:sld xmlns:a="http://schemas.openxmlformats.org/drawingml/2006/main" xmlns:p="http://schemas.openxmlformats.org/presentationml/2006/main" xmlns:r="http://schemas.openxmlformats.org/officeDocument/2006/relationships">
   <p:cSld>
+    <p:bg>
+      <p:bgPr>
+        <a:solidFill>
+          <a:srgbClr val="FFFFFF"/>
+        </a:solidFill>
+        <a:effectLst/>
+      </p:bgPr>
+    </p:bg>
     <p:spTree>
       <p:nvGrpSpPr>
         <p:cNvPr id="1" name=""/>
@@ -3197,83 +3243,57 @@
       <p:grpSpPr/>
       <p:sp>
         <p:nvSpPr>
-          <p:cNvPr id="2" name="Title 1"/>
-          <p:cNvSpPr>
-            <a:spLocks noGrp="1"/>
-          </p:cNvSpPr>
-          <p:nvPr>
-            <p:ph type="title"/>
-          </p:nvPr>
-        </p:nvSpPr>
-        <p:spPr/>
-        <p:txBody>
-          <a:bodyPr/>
-          <a:lstStyle/>
-          <a:p>
-            <a:r>
-              <a:t>Year 2 project</a:t>
-            </a:r>
-          </a:p>
-        </p:txBody>
-      </p:sp>
-      <p:sp>
-        <p:nvSpPr>
-          <p:cNvPr id="3" name="Content Placeholder 2"/>
-          <p:cNvSpPr>
-            <a:spLocks noGrp="1"/>
-          </p:cNvSpPr>
-          <p:nvPr>
-            <p:ph idx="1"/>
-          </p:nvPr>
-        </p:nvSpPr>
-        <p:spPr/>
-        <p:txBody>
-          <a:bodyPr/>
-          <a:lstStyle/>
-          <a:p>
-            <a:pPr>
-              <a:defRPr sz="2000"/>
-            </a:pPr>
-            <a:r>
-              <a:t>✅ Sequence + LMS mock-up</a:t>
-            </a:r>
-          </a:p>
-          <a:p>
-            <a:pPr>
-              <a:defRPr sz="2000"/>
-            </a:pPr>
-            <a:r>
-              <a:t>✅ Portfolio 10–15 pp.</a:t>
-            </a:r>
-          </a:p>
-          <a:p>
-            <a:pPr>
-              <a:defRPr sz="2000"/>
-            </a:pPr>
-            <a:r>
-              <a:t>✅ Tutorial 5 × 90 min</a:t>
-            </a:r>
-          </a:p>
-          <a:p>
-            <a:pPr>
-              <a:defRPr sz="2000"/>
-            </a:pPr>
-            <a:r>
-              <a:t>✅ Questions?</a:t>
-            </a:r>
-          </a:p>
-        </p:txBody>
-      </p:sp>
-      <p:sp>
-        <p:nvSpPr>
-          <p:cNvPr id="4" name="TextBox 3"/>
+          <p:cNvPr id="2" name="Rectangle 1"/>
+          <p:cNvSpPr/>
+          <p:nvPr/>
+        </p:nvSpPr>
+        <p:spPr>
+          <a:xfrm>
+            <a:off x="0" y="0"/>
+            <a:ext cx="109728" cy="6858000"/>
+          </a:xfrm>
+          <a:prstGeom prst="rect">
+            <a:avLst/>
+          </a:prstGeom>
+          <a:solidFill>
+            <a:srgbClr val="2C6E49"/>
+          </a:solidFill>
+          <a:ln>
+            <a:noFill/>
+          </a:ln>
+        </p:spPr>
+        <p:style>
+          <a:lnRef idx="1">
+            <a:schemeClr val="accent1"/>
+          </a:lnRef>
+          <a:fillRef idx="3">
+            <a:schemeClr val="accent1"/>
+          </a:fillRef>
+          <a:effectRef idx="2">
+            <a:schemeClr val="accent1"/>
+          </a:effectRef>
+          <a:fontRef idx="minor">
+            <a:schemeClr val="lt1"/>
+          </a:fontRef>
+        </p:style>
+        <p:txBody>
+          <a:bodyPr rtlCol="0" anchor="ctr"/>
+          <a:lstStyle/>
+          <a:p>
+            <a:pPr algn="ctr"/>
+          </a:p>
+        </p:txBody>
+      </p:sp>
+      <p:sp>
+        <p:nvSpPr>
+          <p:cNvPr id="3" name="TextBox 2"/>
           <p:cNvSpPr txBox="1"/>
           <p:nvPr/>
         </p:nvSpPr>
         <p:spPr>
           <a:xfrm>
-            <a:off x="365760" y="6446520"/>
-            <a:ext cx="8412480" cy="320040"/>
+            <a:off x="457200" y="365760"/>
+            <a:ext cx="8229600" cy="640080"/>
           </a:xfrm>
           <a:prstGeom prst="rect">
             <a:avLst/>
@@ -3281,20 +3301,163 @@
           <a:noFill/>
         </p:spPr>
         <p:txBody>
-          <a:bodyPr wrap="none">
+          <a:bodyPr wrap="square">
             <a:spAutoFit/>
           </a:bodyPr>
           <a:lstStyle/>
           <a:p>
-            <a:pPr algn="ctr">
-              <a:defRPr sz="900">
-                <a:solidFill>
-                  <a:srgbClr val="404040"/>
-                </a:solidFill>
-              </a:defRPr>
-            </a:pPr>
-            <a:r>
-              <a:t>ICT — ENS Year 2 — English Department  •  Diapositive 10/10</a:t>
+            <a:pPr algn="l">
+              <a:defRPr sz="2200" b="1">
+                <a:solidFill>
+                  <a:srgbClr val="1A5C33"/>
+                </a:solidFill>
+              </a:defRPr>
+            </a:pPr>
+            <a:r>
+              <a:t>Course Plan</a:t>
+            </a:r>
+          </a:p>
+        </p:txBody>
+      </p:sp>
+      <p:sp>
+        <p:nvSpPr>
+          <p:cNvPr id="4" name="TextBox 3"/>
+          <p:cNvSpPr txBox="1"/>
+          <p:nvPr/>
+        </p:nvSpPr>
+        <p:spPr>
+          <a:xfrm>
+            <a:off x="457200" y="1371600"/>
+            <a:ext cx="7772400" cy="4572000"/>
+          </a:xfrm>
+          <a:prstGeom prst="rect">
+            <a:avLst/>
+          </a:prstGeom>
+          <a:noFill/>
+        </p:spPr>
+        <p:txBody>
+          <a:bodyPr wrap="square">
+            <a:spAutoFit/>
+          </a:bodyPr>
+          <a:lstStyle/>
+          <a:p>
+            <a:pPr>
+              <a:spcAft>
+                <a:spcPts val="600"/>
+              </a:spcAft>
+              <a:defRPr sz="1400">
+                <a:solidFill>
+                  <a:srgbClr val="222222"/>
+                </a:solidFill>
+              </a:defRPr>
+            </a:pPr>
+            <a:r>
+              <a:t>• Introduction: Why understand computers?</a:t>
+            </a:r>
+          </a:p>
+          <a:p>
+            <a:pPr>
+              <a:spcAft>
+                <a:spcPts val="600"/>
+              </a:spcAft>
+              <a:defRPr sz="1400">
+                <a:solidFill>
+                  <a:srgbClr val="222222"/>
+                </a:solidFill>
+              </a:defRPr>
+            </a:pPr>
+            <a:r>
+              <a:t>• Definition of IT</a:t>
+            </a:r>
+          </a:p>
+          <a:p>
+            <a:pPr>
+              <a:spcAft>
+                <a:spcPts val="600"/>
+              </a:spcAft>
+              <a:defRPr sz="1400">
+                <a:solidFill>
+                  <a:srgbClr val="222222"/>
+                </a:solidFill>
+              </a:defRPr>
+            </a:pPr>
+            <a:r>
+              <a:t>• The computer: concept and model of von Neumann</a:t>
+            </a:r>
+          </a:p>
+          <a:p>
+            <a:pPr>
+              <a:spcAft>
+                <a:spcPts val="600"/>
+              </a:spcAft>
+              <a:defRPr sz="1400">
+                <a:solidFill>
+                  <a:srgbClr val="222222"/>
+                </a:solidFill>
+              </a:defRPr>
+            </a:pPr>
+            <a:r>
+              <a:t>• Hardware components (Hardware)</a:t>
+            </a:r>
+          </a:p>
+          <a:p>
+            <a:pPr>
+              <a:spcAft>
+                <a:spcPts val="600"/>
+              </a:spcAft>
+              <a:defRPr sz="1400">
+                <a:solidFill>
+                  <a:srgbClr val="222222"/>
+                </a:solidFill>
+              </a:defRPr>
+            </a:pPr>
+            <a:r>
+              <a:t>• Software and operating systems (Software)</a:t>
+            </a:r>
+          </a:p>
+          <a:p>
+            <a:pPr>
+              <a:spcAft>
+                <a:spcPts val="600"/>
+              </a:spcAft>
+              <a:defRPr sz="1400">
+                <a:solidFill>
+                  <a:srgbClr val="222222"/>
+                </a:solidFill>
+              </a:defRPr>
+            </a:pPr>
+            <a:r>
+              <a:t>• Interaction between Hardware and Software</a:t>
+            </a:r>
+          </a:p>
+          <a:p>
+            <a:pPr>
+              <a:spcAft>
+                <a:spcPts val="600"/>
+              </a:spcAft>
+              <a:defRPr sz="1400">
+                <a:solidFill>
+                  <a:srgbClr val="222222"/>
+                </a:solidFill>
+              </a:defRPr>
+            </a:pPr>
+            <a:r>
+              <a:t>• Best practices for university students</a:t>
+            </a:r>
+          </a:p>
+          <a:p>
+            <a:pPr>
+              <a:spcAft>
+                <a:spcPts val="600"/>
+              </a:spcAft>
+              <a:defRPr sz="1400">
+                <a:solidFill>
+                  <a:srgbClr val="222222"/>
+                </a:solidFill>
+              </a:defRPr>
+            </a:pPr>
+            <a:r>
+              <a:t>• Conclusion and transition to Windows</a:t>
             </a:r>
           </a:p>
         </p:txBody>
@@ -3304,15 +3467,20 @@
   <p:clrMapOvr>
     <a:masterClrMapping/>
   </p:clrMapOvr>
-  <p:transition spd="med">
-    <p:fade/>
-  </p:transition>
 </p:sld>
 </file>
 
-<file path=ppt/slides/slide2.xml><?xml version="1.0" encoding="utf-8"?>
+<file path=ppt/slides/slide11.xml><?xml version="1.0" encoding="utf-8"?>
 <p:sld xmlns:a="http://schemas.openxmlformats.org/drawingml/2006/main" xmlns:p="http://schemas.openxmlformats.org/presentationml/2006/main" xmlns:r="http://schemas.openxmlformats.org/officeDocument/2006/relationships">
   <p:cSld>
+    <p:bg>
+      <p:bgPr>
+        <a:solidFill>
+          <a:srgbClr val="FFFFFF"/>
+        </a:solidFill>
+        <a:effectLst/>
+      </p:bgPr>
+    </p:bg>
     <p:spTree>
       <p:nvGrpSpPr>
         <p:cNvPr id="1" name=""/>
@@ -3322,99 +3490,57 @@
       <p:grpSpPr/>
       <p:sp>
         <p:nvSpPr>
-          <p:cNvPr id="2" name="Title 1"/>
-          <p:cNvSpPr>
-            <a:spLocks noGrp="1"/>
-          </p:cNvSpPr>
-          <p:nvPr>
-            <p:ph type="title"/>
-          </p:nvPr>
-        </p:nvSpPr>
-        <p:spPr/>
-        <p:txBody>
-          <a:bodyPr/>
-          <a:lstStyle/>
-          <a:p>
-            <a:r>
-              <a:t>Learning objectives</a:t>
-            </a:r>
-          </a:p>
-        </p:txBody>
-      </p:sp>
-      <p:sp>
-        <p:nvSpPr>
-          <p:cNvPr id="3" name="Content Placeholder 2"/>
-          <p:cNvSpPr>
-            <a:spLocks noGrp="1"/>
-          </p:cNvSpPr>
-          <p:nvPr>
-            <p:ph idx="1"/>
-          </p:nvPr>
-        </p:nvSpPr>
-        <p:spPr/>
-        <p:txBody>
-          <a:bodyPr/>
-          <a:lstStyle/>
-          <a:p>
-            <a:pPr>
-              <a:defRPr sz="2000"/>
-            </a:pPr>
-            <a:r>
-              <a:t>🎯 2–3 session sequence</a:t>
-            </a:r>
-          </a:p>
-          <a:p>
-            <a:pPr>
-              <a:defRPr sz="2000"/>
-            </a:pPr>
-            <a:r>
-              <a:t>🎯 Advanced Moodle</a:t>
-            </a:r>
-          </a:p>
-          <a:p>
-            <a:pPr>
-              <a:defRPr sz="2000"/>
-            </a:pPr>
-            <a:r>
-              <a:t>🎯 Placement portfolio</a:t>
-            </a:r>
-          </a:p>
-          <a:p>
-            <a:pPr>
-              <a:defRPr sz="2000"/>
-            </a:pPr>
-            <a:r>
-              <a:t>🎯 OER / media</a:t>
-            </a:r>
-          </a:p>
-          <a:p>
-            <a:pPr>
-              <a:defRPr sz="2000"/>
-            </a:pPr>
-            <a:r>
-              <a:t>🎯 AI charter</a:t>
-            </a:r>
-          </a:p>
-          <a:p>
-            <a:pPr>
-              <a:defRPr sz="2000"/>
-            </a:pPr>
-            <a:r>
-              <a:t>🎯 Action research</a:t>
-            </a:r>
-          </a:p>
-        </p:txBody>
-      </p:sp>
-      <p:sp>
-        <p:nvSpPr>
-          <p:cNvPr id="4" name="TextBox 3"/>
+          <p:cNvPr id="2" name="Rectangle 1"/>
+          <p:cNvSpPr/>
+          <p:nvPr/>
+        </p:nvSpPr>
+        <p:spPr>
+          <a:xfrm>
+            <a:off x="0" y="0"/>
+            <a:ext cx="109728" cy="6858000"/>
+          </a:xfrm>
+          <a:prstGeom prst="rect">
+            <a:avLst/>
+          </a:prstGeom>
+          <a:solidFill>
+            <a:srgbClr val="2C6E49"/>
+          </a:solidFill>
+          <a:ln>
+            <a:noFill/>
+          </a:ln>
+        </p:spPr>
+        <p:style>
+          <a:lnRef idx="1">
+            <a:schemeClr val="accent1"/>
+          </a:lnRef>
+          <a:fillRef idx="3">
+            <a:schemeClr val="accent1"/>
+          </a:fillRef>
+          <a:effectRef idx="2">
+            <a:schemeClr val="accent1"/>
+          </a:effectRef>
+          <a:fontRef idx="minor">
+            <a:schemeClr val="lt1"/>
+          </a:fontRef>
+        </p:style>
+        <p:txBody>
+          <a:bodyPr rtlCol="0" anchor="ctr"/>
+          <a:lstStyle/>
+          <a:p>
+            <a:pPr algn="ctr"/>
+          </a:p>
+        </p:txBody>
+      </p:sp>
+      <p:sp>
+        <p:nvSpPr>
+          <p:cNvPr id="3" name="TextBox 2"/>
           <p:cNvSpPr txBox="1"/>
           <p:nvPr/>
         </p:nvSpPr>
         <p:spPr>
           <a:xfrm>
-            <a:off x="365760" y="6446520"/>
-            <a:ext cx="8412480" cy="320040"/>
+            <a:off x="457200" y="365760"/>
+            <a:ext cx="8229600" cy="640080"/>
           </a:xfrm>
           <a:prstGeom prst="rect">
             <a:avLst/>
@@ -3422,20 +3548,73 @@
           <a:noFill/>
         </p:spPr>
         <p:txBody>
-          <a:bodyPr wrap="none">
+          <a:bodyPr wrap="square">
             <a:spAutoFit/>
           </a:bodyPr>
           <a:lstStyle/>
           <a:p>
-            <a:pPr algn="ctr">
-              <a:defRPr sz="900">
-                <a:solidFill>
-                  <a:srgbClr val="404040"/>
-                </a:solidFill>
-              </a:defRPr>
-            </a:pPr>
-            <a:r>
-              <a:t>ICT — ENS Year 2 — English Department  •  Diapositive 2/10</a:t>
+            <a:pPr algn="l">
+              <a:defRPr sz="2200" b="1">
+                <a:solidFill>
+                  <a:srgbClr val="1A5C33"/>
+                </a:solidFill>
+              </a:defRPr>
+            </a:pPr>
+            <a:r>
+              <a:t>1. Introduction(10 min)</a:t>
+            </a:r>
+          </a:p>
+        </p:txBody>
+      </p:sp>
+      <p:sp>
+        <p:nvSpPr>
+          <p:cNvPr id="4" name="TextBox 3"/>
+          <p:cNvSpPr txBox="1"/>
+          <p:nvPr/>
+        </p:nvSpPr>
+        <p:spPr>
+          <a:xfrm>
+            <a:off x="457200" y="1371600"/>
+            <a:ext cx="7772400" cy="4572000"/>
+          </a:xfrm>
+          <a:prstGeom prst="rect">
+            <a:avLst/>
+          </a:prstGeom>
+          <a:noFill/>
+        </p:spPr>
+        <p:txBody>
+          <a:bodyPr wrap="square">
+            <a:spAutoFit/>
+          </a:bodyPr>
+          <a:lstStyle/>
+          <a:p>
+            <a:pPr>
+              <a:spcAft>
+                <a:spcPts val="600"/>
+              </a:spcAft>
+              <a:defRPr sz="1400">
+                <a:solidFill>
+                  <a:srgbClr val="222222"/>
+                </a:solidFill>
+              </a:defRPr>
+            </a:pPr>
+            <a:r>
+              <a:t>• Understanding how the computer works is essential for any student, even in the Languages ​​sector. This allows you to better use your tools (Word, browser, Moodle), avoid data loss, diagnose simple problems and effectively organize your digital workspace.</a:t>
+            </a:r>
+          </a:p>
+          <a:p>
+            <a:pPr>
+              <a:spcAft>
+                <a:spcPts val="600"/>
+              </a:spcAft>
+              <a:defRPr sz="1400">
+                <a:solidFill>
+                  <a:srgbClr val="222222"/>
+                </a:solidFill>
+              </a:defRPr>
+            </a:pPr>
+            <a:r>
+              <a:t>• The computer has becomethe main university working instrument.</a:t>
             </a:r>
           </a:p>
         </p:txBody>
@@ -3445,15 +3624,20 @@
   <p:clrMapOvr>
     <a:masterClrMapping/>
   </p:clrMapOvr>
-  <p:transition spd="med">
-    <p:fade/>
-  </p:transition>
 </p:sld>
 </file>
 
-<file path=ppt/slides/slide3.xml><?xml version="1.0" encoding="utf-8"?>
+<file path=ppt/slides/slide12.xml><?xml version="1.0" encoding="utf-8"?>
 <p:sld xmlns:a="http://schemas.openxmlformats.org/drawingml/2006/main" xmlns:p="http://schemas.openxmlformats.org/presentationml/2006/main" xmlns:r="http://schemas.openxmlformats.org/officeDocument/2006/relationships">
   <p:cSld>
+    <p:bg>
+      <p:bgPr>
+        <a:solidFill>
+          <a:srgbClr val="FFFFFF"/>
+        </a:solidFill>
+        <a:effectLst/>
+      </p:bgPr>
+    </p:bg>
     <p:spTree>
       <p:nvGrpSpPr>
         <p:cNvPr id="1" name=""/>
@@ -3463,99 +3647,57 @@
       <p:grpSpPr/>
       <p:sp>
         <p:nvSpPr>
-          <p:cNvPr id="2" name="Title 1"/>
-          <p:cNvSpPr>
-            <a:spLocks noGrp="1"/>
-          </p:cNvSpPr>
-          <p:nvPr>
-            <p:ph type="title"/>
-          </p:nvPr>
-        </p:nvSpPr>
-        <p:spPr/>
-        <p:txBody>
-          <a:bodyPr/>
-          <a:lstStyle/>
-          <a:p>
-            <a:r>
-              <a:t>Course outline</a:t>
-            </a:r>
-          </a:p>
-        </p:txBody>
-      </p:sp>
-      <p:sp>
-        <p:nvSpPr>
-          <p:cNvPr id="3" name="Content Placeholder 2"/>
-          <p:cNvSpPr>
-            <a:spLocks noGrp="1"/>
-          </p:cNvSpPr>
-          <p:nvPr>
-            <p:ph idx="1"/>
-          </p:nvPr>
-        </p:nvSpPr>
-        <p:spPr/>
-        <p:txBody>
-          <a:bodyPr/>
-          <a:lstStyle/>
-          <a:p>
-            <a:pPr>
-              <a:defRPr sz="2000"/>
-            </a:pPr>
-            <a:r>
-              <a:t>📋 DigCompEdu B1</a:t>
-            </a:r>
-          </a:p>
-          <a:p>
-            <a:pPr>
-              <a:defRPr sz="2000"/>
-            </a:pPr>
-            <a:r>
-              <a:t>📋 Sequencing</a:t>
-            </a:r>
-          </a:p>
-          <a:p>
-            <a:pPr>
-              <a:defRPr sz="2000"/>
-            </a:pPr>
-            <a:r>
-              <a:t>📋 LMS assessment</a:t>
-            </a:r>
-          </a:p>
-          <a:p>
-            <a:pPr>
-              <a:defRPr sz="2000"/>
-            </a:pPr>
-            <a:r>
-              <a:t>📋 OER</a:t>
-            </a:r>
-          </a:p>
-          <a:p>
-            <a:pPr>
-              <a:defRPr sz="2000"/>
-            </a:pPr>
-            <a:r>
-              <a:t>📋 Portfolio</a:t>
-            </a:r>
-          </a:p>
-          <a:p>
-            <a:pPr>
-              <a:defRPr sz="2000"/>
-            </a:pPr>
-            <a:r>
-              <a:t>📋 Hybrid</a:t>
-            </a:r>
-          </a:p>
-        </p:txBody>
-      </p:sp>
-      <p:sp>
-        <p:nvSpPr>
-          <p:cNvPr id="4" name="TextBox 3"/>
+          <p:cNvPr id="2" name="Rectangle 1"/>
+          <p:cNvSpPr/>
+          <p:nvPr/>
+        </p:nvSpPr>
+        <p:spPr>
+          <a:xfrm>
+            <a:off x="0" y="0"/>
+            <a:ext cx="109728" cy="6858000"/>
+          </a:xfrm>
+          <a:prstGeom prst="rect">
+            <a:avLst/>
+          </a:prstGeom>
+          <a:solidFill>
+            <a:srgbClr val="2C6E49"/>
+          </a:solidFill>
+          <a:ln>
+            <a:noFill/>
+          </a:ln>
+        </p:spPr>
+        <p:style>
+          <a:lnRef idx="1">
+            <a:schemeClr val="accent1"/>
+          </a:lnRef>
+          <a:fillRef idx="3">
+            <a:schemeClr val="accent1"/>
+          </a:fillRef>
+          <a:effectRef idx="2">
+            <a:schemeClr val="accent1"/>
+          </a:effectRef>
+          <a:fontRef idx="minor">
+            <a:schemeClr val="lt1"/>
+          </a:fontRef>
+        </p:style>
+        <p:txBody>
+          <a:bodyPr rtlCol="0" anchor="ctr"/>
+          <a:lstStyle/>
+          <a:p>
+            <a:pPr algn="ctr"/>
+          </a:p>
+        </p:txBody>
+      </p:sp>
+      <p:sp>
+        <p:nvSpPr>
+          <p:cNvPr id="3" name="TextBox 2"/>
           <p:cNvSpPr txBox="1"/>
           <p:nvPr/>
         </p:nvSpPr>
         <p:spPr>
           <a:xfrm>
-            <a:off x="365760" y="6446520"/>
-            <a:ext cx="8412480" cy="320040"/>
+            <a:off x="457200" y="365760"/>
+            <a:ext cx="8229600" cy="640080"/>
           </a:xfrm>
           <a:prstGeom prst="rect">
             <a:avLst/>
@@ -3563,20 +3705,73 @@
           <a:noFill/>
         </p:spPr>
         <p:txBody>
-          <a:bodyPr wrap="none">
+          <a:bodyPr wrap="square">
             <a:spAutoFit/>
           </a:bodyPr>
           <a:lstStyle/>
           <a:p>
-            <a:pPr algn="ctr">
-              <a:defRPr sz="900">
-                <a:solidFill>
-                  <a:srgbClr val="404040"/>
-                </a:solidFill>
-              </a:defRPr>
-            </a:pPr>
-            <a:r>
-              <a:t>ICT — ENS Year 2 — English Department  •  Diapositive 3/10</a:t>
+            <a:pPr algn="l">
+              <a:defRPr sz="2200" b="1">
+                <a:solidFill>
+                  <a:srgbClr val="1A5C33"/>
+                </a:solidFill>
+              </a:defRPr>
+            </a:pPr>
+            <a:r>
+              <a:t>2. What is IT?(10 mins)</a:t>
+            </a:r>
+          </a:p>
+        </p:txBody>
+      </p:sp>
+      <p:sp>
+        <p:nvSpPr>
+          <p:cNvPr id="4" name="TextBox 3"/>
+          <p:cNvSpPr txBox="1"/>
+          <p:nvPr/>
+        </p:nvSpPr>
+        <p:spPr>
+          <a:xfrm>
+            <a:off x="457200" y="1371600"/>
+            <a:ext cx="7772400" cy="4572000"/>
+          </a:xfrm>
+          <a:prstGeom prst="rect">
+            <a:avLst/>
+          </a:prstGeom>
+          <a:noFill/>
+        </p:spPr>
+        <p:txBody>
+          <a:bodyPr wrap="square">
+            <a:spAutoFit/>
+          </a:bodyPr>
+          <a:lstStyle/>
+          <a:p>
+            <a:pPr>
+              <a:spcAft>
+                <a:spcPts val="600"/>
+              </a:spcAft>
+              <a:defRPr sz="1400">
+                <a:solidFill>
+                  <a:srgbClr val="222222"/>
+                </a:solidFill>
+              </a:defRPr>
+            </a:pPr>
+            <a:r>
+              <a:t>• Computer scienceis the science ofautomatic information processingusing algorithms executed by machines. It includes theory, hardware, software and networks.</a:t>
+            </a:r>
+          </a:p>
+          <a:p>
+            <a:pPr>
+              <a:spcAft>
+                <a:spcPts val="600"/>
+              </a:spcAft>
+              <a:defRPr sz="1400">
+                <a:solidFill>
+                  <a:srgbClr val="222222"/>
+                </a:solidFill>
+              </a:defRPr>
+            </a:pPr>
+            <a:r>
+              <a:t>• Userapproach: understand enough to use the computer well in your studies.</a:t>
             </a:r>
           </a:p>
         </p:txBody>
@@ -3586,15 +3781,20 @@
   <p:clrMapOvr>
     <a:masterClrMapping/>
   </p:clrMapOvr>
-  <p:transition spd="med">
-    <p:fade/>
-  </p:transition>
 </p:sld>
 </file>
 
-<file path=ppt/slides/slide4.xml><?xml version="1.0" encoding="utf-8"?>
+<file path=ppt/slides/slide13.xml><?xml version="1.0" encoding="utf-8"?>
 <p:sld xmlns:a="http://schemas.openxmlformats.org/drawingml/2006/main" xmlns:p="http://schemas.openxmlformats.org/presentationml/2006/main" xmlns:r="http://schemas.openxmlformats.org/officeDocument/2006/relationships">
   <p:cSld>
+    <p:bg>
+      <p:bgPr>
+        <a:solidFill>
+          <a:srgbClr val="E8F0E9"/>
+        </a:solidFill>
+        <a:effectLst/>
+      </p:bgPr>
+    </p:bg>
     <p:spTree>
       <p:nvGrpSpPr>
         <p:cNvPr id="1" name=""/>
@@ -3604,83 +3804,14 @@
       <p:grpSpPr/>
       <p:sp>
         <p:nvSpPr>
-          <p:cNvPr id="2" name="Title 1"/>
-          <p:cNvSpPr>
-            <a:spLocks noGrp="1"/>
-          </p:cNvSpPr>
-          <p:nvPr>
-            <p:ph type="title"/>
-          </p:nvPr>
-        </p:nvSpPr>
-        <p:spPr/>
-        <p:txBody>
-          <a:bodyPr/>
-          <a:lstStyle/>
-          <a:p>
-            <a:r>
-              <a:t>Sequencing</a:t>
-            </a:r>
-          </a:p>
-        </p:txBody>
-      </p:sp>
-      <p:sp>
-        <p:nvSpPr>
-          <p:cNvPr id="3" name="Content Placeholder 2"/>
-          <p:cNvSpPr>
-            <a:spLocks noGrp="1"/>
-          </p:cNvSpPr>
-          <p:nvPr>
-            <p:ph idx="1"/>
-          </p:nvPr>
-        </p:nvSpPr>
-        <p:spPr/>
-        <p:txBody>
-          <a:bodyPr/>
-          <a:lstStyle/>
-          <a:p>
-            <a:pPr>
-              <a:defRPr sz="2000"/>
-            </a:pPr>
-            <a:r>
-              <a:t>🧭 CEFR alignment</a:t>
-            </a:r>
-          </a:p>
-          <a:p>
-            <a:pPr>
-              <a:defRPr sz="2000"/>
-            </a:pPr>
-            <a:r>
-              <a:t>🧭 2–3 sessions</a:t>
-            </a:r>
-          </a:p>
-          <a:p>
-            <a:pPr>
-              <a:defRPr sz="2000"/>
-            </a:pPr>
-            <a:r>
-              <a:t>🧭 Authentic tasks</a:t>
-            </a:r>
-          </a:p>
-          <a:p>
-            <a:pPr>
-              <a:defRPr sz="2000"/>
-            </a:pPr>
-            <a:r>
-              <a:t>🧭 Success criteria</a:t>
-            </a:r>
-          </a:p>
-        </p:txBody>
-      </p:sp>
-      <p:sp>
-        <p:nvSpPr>
-          <p:cNvPr id="4" name="TextBox 3"/>
+          <p:cNvPr id="2" name="TextBox 1"/>
           <p:cNvSpPr txBox="1"/>
           <p:nvPr/>
         </p:nvSpPr>
         <p:spPr>
           <a:xfrm>
-            <a:off x="365760" y="6446520"/>
-            <a:ext cx="8412480" cy="320040"/>
+            <a:off x="548640" y="365760"/>
+            <a:ext cx="7772400" cy="640080"/>
           </a:xfrm>
           <a:prstGeom prst="rect">
             <a:avLst/>
@@ -3688,20 +3819,138 @@
           <a:noFill/>
         </p:spPr>
         <p:txBody>
-          <a:bodyPr wrap="none">
+          <a:bodyPr wrap="square">
             <a:spAutoFit/>
           </a:bodyPr>
           <a:lstStyle/>
           <a:p>
             <a:pPr algn="ctr">
-              <a:defRPr sz="900">
-                <a:solidFill>
-                  <a:srgbClr val="404040"/>
-                </a:solidFill>
-              </a:defRPr>
-            </a:pPr>
-            <a:r>
-              <a:t>ICT — ENS Year 2 — English Department  •  Diapositive 4/10</a:t>
+              <a:defRPr sz="2600" b="1">
+                <a:solidFill>
+                  <a:srgbClr val="1A5C33"/>
+                </a:solidFill>
+              </a:defRPr>
+            </a:pPr>
+            <a:r>
+              <a:t>📝 Points clés à retenir</a:t>
+            </a:r>
+          </a:p>
+        </p:txBody>
+      </p:sp>
+      <p:sp>
+        <p:nvSpPr>
+          <p:cNvPr id="3" name="TextBox 2"/>
+          <p:cNvSpPr txBox="1"/>
+          <p:nvPr/>
+        </p:nvSpPr>
+        <p:spPr>
+          <a:xfrm>
+            <a:off x="548640" y="1828800"/>
+            <a:ext cx="7772400" cy="4572000"/>
+          </a:xfrm>
+          <a:prstGeom prst="rect">
+            <a:avLst/>
+          </a:prstGeom>
+          <a:noFill/>
+        </p:spPr>
+        <p:txBody>
+          <a:bodyPr wrap="square">
+            <a:spAutoFit/>
+          </a:bodyPr>
+          <a:lstStyle/>
+          <a:p>
+            <a:pPr>
+              <a:spcAft>
+                <a:spcPts val="600"/>
+              </a:spcAft>
+              <a:defRPr sz="1600">
+                <a:solidFill>
+                  <a:srgbClr val="222222"/>
+                </a:solidFill>
+              </a:defRPr>
+            </a:pPr>
+            <a:r>
+              <a:t>• Knowledge:- Define ICT and its evolution</a:t>
+            </a:r>
+            <a:br/>
+            <a:r>
+              <a:t>- Distinguish technical, information, and communication dimensions</a:t>
+            </a:r>
+            <a:br/>
+            <a:r>
+              <a:t>- Understand pedagogical ICT integration in language didactics</a:t>
+            </a:r>
+          </a:p>
+          <a:p>
+            <a:pPr>
+              <a:spcAft>
+                <a:spcPts val="600"/>
+              </a:spcAft>
+              <a:defRPr sz="1600">
+                <a:solidFill>
+                  <a:srgbClr val="222222"/>
+                </a:solidFill>
+              </a:defRPr>
+            </a:pPr>
+            <a:r>
+              <a:t>• ICTcovers digital tools and systems for creating, processing, storing, transmitting, and sharing information.</a:t>
+            </a:r>
+          </a:p>
+          <a:p>
+            <a:pPr>
+              <a:spcAft>
+                <a:spcPts val="600"/>
+              </a:spcAft>
+              <a:defRPr sz="1600">
+                <a:solidFill>
+                  <a:srgbClr val="222222"/>
+                </a:solidFill>
+              </a:defRPr>
+            </a:pPr>
+            <a:r>
+              <a:t>• Why integrate ICT in language teaching?- Learner motivation and engagement</a:t>
+            </a:r>
+            <a:br/>
+            <a:r>
+              <a:t>- Access to authentic resources (videos, articles, podcasts)</a:t>
+            </a:r>
+            <a:br/>
+            <a:r>
+              <a:t>- Individualized learning paths</a:t>
+            </a:r>
+            <a:br/>
+            <a:r>
+              <a:t>- Autonomy development</a:t>
+            </a:r>
+          </a:p>
+          <a:p>
+            <a:pPr>
+              <a:spcAft>
+                <a:spcPts val="600"/>
+              </a:spcAft>
+              <a:defRPr sz="1600">
+                <a:solidFill>
+                  <a:srgbClr val="222222"/>
+                </a:solidFill>
+              </a:defRPr>
+            </a:pPr>
+            <a:r>
+              <a:t>• Design sequences integrating digital tools</a:t>
+            </a:r>
+          </a:p>
+          <a:p>
+            <a:pPr>
+              <a:spcAft>
+                <a:spcPts val="600"/>
+              </a:spcAft>
+              <a:defRPr sz="1600">
+                <a:solidFill>
+                  <a:srgbClr val="222222"/>
+                </a:solidFill>
+              </a:defRPr>
+            </a:pPr>
+            <a:r>
+              <a:t>• GDPR compliance:protect student data</a:t>
             </a:r>
           </a:p>
         </p:txBody>
@@ -3711,15 +3960,20 @@
   <p:clrMapOvr>
     <a:masterClrMapping/>
   </p:clrMapOvr>
-  <p:transition spd="med">
-    <p:fade/>
-  </p:transition>
 </p:sld>
 </file>
 
-<file path=ppt/slides/slide5.xml><?xml version="1.0" encoding="utf-8"?>
+<file path=ppt/slides/slide14.xml><?xml version="1.0" encoding="utf-8"?>
 <p:sld xmlns:a="http://schemas.openxmlformats.org/drawingml/2006/main" xmlns:p="http://schemas.openxmlformats.org/presentationml/2006/main" xmlns:r="http://schemas.openxmlformats.org/officeDocument/2006/relationships">
   <p:cSld>
+    <p:bg>
+      <p:bgPr>
+        <a:solidFill>
+          <a:srgbClr val="FFFFFF"/>
+        </a:solidFill>
+        <a:effectLst/>
+      </p:bgPr>
+    </p:bg>
     <p:spTree>
       <p:nvGrpSpPr>
         <p:cNvPr id="1" name=""/>
@@ -3729,83 +3983,14 @@
       <p:grpSpPr/>
       <p:sp>
         <p:nvSpPr>
-          <p:cNvPr id="2" name="Title 1"/>
-          <p:cNvSpPr>
-            <a:spLocks noGrp="1"/>
-          </p:cNvSpPr>
-          <p:nvPr>
-            <p:ph type="title"/>
-          </p:nvPr>
-        </p:nvSpPr>
-        <p:spPr/>
-        <p:txBody>
-          <a:bodyPr/>
-          <a:lstStyle/>
-          <a:p>
-            <a:r>
-              <a:t>Advanced Moodle</a:t>
-            </a:r>
-          </a:p>
-        </p:txBody>
-      </p:sp>
-      <p:sp>
-        <p:nvSpPr>
-          <p:cNvPr id="3" name="Content Placeholder 2"/>
-          <p:cNvSpPr>
-            <a:spLocks noGrp="1"/>
-          </p:cNvSpPr>
-          <p:nvPr>
-            <p:ph idx="1"/>
-          </p:nvPr>
-        </p:nvSpPr>
-        <p:spPr/>
-        <p:txBody>
-          <a:bodyPr/>
-          <a:lstStyle/>
-          <a:p>
-            <a:pPr>
-              <a:defRPr sz="2000"/>
-            </a:pPr>
-            <a:r>
-              <a:t>🖥️ Quiz feedback</a:t>
-            </a:r>
-          </a:p>
-          <a:p>
-            <a:pPr>
-              <a:defRPr sz="2000"/>
-            </a:pPr>
-            <a:r>
-              <a:t>🖥️ Moderated forums</a:t>
-            </a:r>
-          </a:p>
-          <a:p>
-            <a:pPr>
-              <a:defRPr sz="2000"/>
-            </a:pPr>
-            <a:r>
-              <a:t>🖥️ H5P</a:t>
-            </a:r>
-          </a:p>
-          <a:p>
-            <a:pPr>
-              <a:defRPr sz="2000"/>
-            </a:pPr>
-            <a:r>
-              <a:t>🖥️ Assignment rubrics</a:t>
-            </a:r>
-          </a:p>
-        </p:txBody>
-      </p:sp>
-      <p:sp>
-        <p:nvSpPr>
-          <p:cNvPr id="4" name="TextBox 3"/>
+          <p:cNvPr id="2" name="TextBox 1"/>
           <p:cNvSpPr txBox="1"/>
           <p:nvPr/>
         </p:nvSpPr>
         <p:spPr>
           <a:xfrm>
-            <a:off x="365760" y="6446520"/>
-            <a:ext cx="8412480" cy="320040"/>
+            <a:off x="548640" y="365760"/>
+            <a:ext cx="7772400" cy="640080"/>
           </a:xfrm>
           <a:prstGeom prst="rect">
             <a:avLst/>
@@ -3813,20 +3998,118 @@
           <a:noFill/>
         </p:spPr>
         <p:txBody>
-          <a:bodyPr wrap="none">
+          <a:bodyPr wrap="square">
             <a:spAutoFit/>
           </a:bodyPr>
           <a:lstStyle/>
           <a:p>
             <a:pPr algn="ctr">
-              <a:defRPr sz="900">
-                <a:solidFill>
-                  <a:srgbClr val="404040"/>
-                </a:solidFill>
-              </a:defRPr>
-            </a:pPr>
-            <a:r>
-              <a:t>ICT — ENS Year 2 — English Department  •  Diapositive 5/10</a:t>
+              <a:defRPr sz="2600" b="1">
+                <a:solidFill>
+                  <a:srgbClr val="1A5C33"/>
+                </a:solidFill>
+              </a:defRPr>
+            </a:pPr>
+            <a:r>
+              <a:t>✏️ Exercices d'application</a:t>
+            </a:r>
+          </a:p>
+        </p:txBody>
+      </p:sp>
+      <p:sp>
+        <p:nvSpPr>
+          <p:cNvPr id="3" name="TextBox 2"/>
+          <p:cNvSpPr txBox="1"/>
+          <p:nvPr/>
+        </p:nvSpPr>
+        <p:spPr>
+          <a:xfrm>
+            <a:off x="548640" y="1828800"/>
+            <a:ext cx="7772400" cy="4572000"/>
+          </a:xfrm>
+          <a:prstGeom prst="rect">
+            <a:avLst/>
+          </a:prstGeom>
+          <a:noFill/>
+        </p:spPr>
+        <p:txBody>
+          <a:bodyPr wrap="square">
+            <a:spAutoFit/>
+          </a:bodyPr>
+          <a:lstStyle/>
+          <a:p>
+            <a:pPr>
+              <a:spcAft>
+                <a:spcPts val="600"/>
+              </a:spcAft>
+              <a:defRPr sz="1500">
+                <a:solidFill>
+                  <a:srgbClr val="222222"/>
+                </a:solidFill>
+              </a:defRPr>
+            </a:pPr>
+            <a:r>
+              <a:t>• Définir les concepts principaux du cours</a:t>
+            </a:r>
+          </a:p>
+          <a:p>
+            <a:pPr>
+              <a:spcAft>
+                <a:spcPts val="600"/>
+              </a:spcAft>
+              <a:defRPr sz="1500">
+                <a:solidFill>
+                  <a:srgbClr val="222222"/>
+                </a:solidFill>
+              </a:defRPr>
+            </a:pPr>
+            <a:r>
+              <a:t>• Identifier les applications pratiques</a:t>
+            </a:r>
+          </a:p>
+          <a:p>
+            <a:pPr>
+              <a:spcAft>
+                <a:spcPts val="600"/>
+              </a:spcAft>
+              <a:defRPr sz="1500">
+                <a:solidFill>
+                  <a:srgbClr val="222222"/>
+                </a:solidFill>
+              </a:defRPr>
+            </a:pPr>
+            <a:r>
+              <a:t>• Résoudre les exercices du TD</a:t>
+            </a:r>
+          </a:p>
+          <a:p>
+            <a:pPr>
+              <a:spcAft>
+                <a:spcPts val="600"/>
+              </a:spcAft>
+              <a:defRPr sz="1500">
+                <a:solidFill>
+                  <a:srgbClr val="222222"/>
+                </a:solidFill>
+              </a:defRPr>
+            </a:pPr>
+            <a:r>
+              <a:t>• Synthétiser les points clés en un paragraphe</a:t>
+            </a:r>
+          </a:p>
+          <a:p>
+            <a:pPr>
+              <a:spcAft>
+                <a:spcPts val="600"/>
+              </a:spcAft>
+              <a:defRPr sz="1500">
+                <a:solidFill>
+                  <a:srgbClr val="222222"/>
+                </a:solidFill>
+              </a:defRPr>
+            </a:pPr>
+            <a:r>
+              <a:t>• Préparer une courte présentation orale</a:t>
             </a:r>
           </a:p>
         </p:txBody>
@@ -3836,15 +4119,20 @@
   <p:clrMapOvr>
     <a:masterClrMapping/>
   </p:clrMapOvr>
-  <p:transition spd="med">
-    <p:fade/>
-  </p:transition>
 </p:sld>
 </file>
 
-<file path=ppt/slides/slide6.xml><?xml version="1.0" encoding="utf-8"?>
+<file path=ppt/slides/slide15.xml><?xml version="1.0" encoding="utf-8"?>
 <p:sld xmlns:a="http://schemas.openxmlformats.org/drawingml/2006/main" xmlns:p="http://schemas.openxmlformats.org/presentationml/2006/main" xmlns:r="http://schemas.openxmlformats.org/officeDocument/2006/relationships">
   <p:cSld>
+    <p:bg>
+      <p:bgPr>
+        <a:solidFill>
+          <a:srgbClr val="1A5C33"/>
+        </a:solidFill>
+        <a:effectLst/>
+      </p:bgPr>
+    </p:bg>
     <p:spTree>
       <p:nvGrpSpPr>
         <p:cNvPr id="1" name=""/>
@@ -3854,83 +4142,14 @@
       <p:grpSpPr/>
       <p:sp>
         <p:nvSpPr>
-          <p:cNvPr id="2" name="Title 1"/>
-          <p:cNvSpPr>
-            <a:spLocks noGrp="1"/>
-          </p:cNvSpPr>
-          <p:nvPr>
-            <p:ph type="title"/>
-          </p:nvPr>
-        </p:nvSpPr>
-        <p:spPr/>
-        <p:txBody>
-          <a:bodyPr/>
-          <a:lstStyle/>
-          <a:p>
-            <a:r>
-              <a:t>Media &amp; OER</a:t>
-            </a:r>
-          </a:p>
-        </p:txBody>
-      </p:sp>
-      <p:sp>
-        <p:nvSpPr>
-          <p:cNvPr id="3" name="Content Placeholder 2"/>
-          <p:cNvSpPr>
-            <a:spLocks noGrp="1"/>
-          </p:cNvSpPr>
-          <p:nvPr>
-            <p:ph idx="1"/>
-          </p:nvPr>
-        </p:nvSpPr>
-        <p:spPr/>
-        <p:txBody>
-          <a:bodyPr/>
-          <a:lstStyle/>
-          <a:p>
-            <a:pPr>
-              <a:defRPr sz="2000"/>
-            </a:pPr>
-            <a:r>
-              <a:t>🌍 Creative Commons</a:t>
-            </a:r>
-          </a:p>
-          <a:p>
-            <a:pPr>
-              <a:defRPr sz="2000"/>
-            </a:pPr>
-            <a:r>
-              <a:t>🌍 Pupil co-creation</a:t>
-            </a:r>
-          </a:p>
-          <a:p>
-            <a:pPr>
-              <a:defRPr sz="2000"/>
-            </a:pPr>
-            <a:r>
-              <a:t>🌍 Subtitles</a:t>
-            </a:r>
-          </a:p>
-          <a:p>
-            <a:pPr>
-              <a:defRPr sz="2000"/>
-            </a:pPr>
-            <a:r>
-              <a:t>🌍 Moderation</a:t>
-            </a:r>
-          </a:p>
-        </p:txBody>
-      </p:sp>
-      <p:sp>
-        <p:nvSpPr>
-          <p:cNvPr id="4" name="TextBox 3"/>
+          <p:cNvPr id="2" name="TextBox 1"/>
           <p:cNvSpPr txBox="1"/>
           <p:nvPr/>
         </p:nvSpPr>
         <p:spPr>
           <a:xfrm>
-            <a:off x="365760" y="6446520"/>
-            <a:ext cx="8412480" cy="320040"/>
+            <a:off x="731520" y="1371600"/>
+            <a:ext cx="7680960" cy="914400"/>
           </a:xfrm>
           <a:prstGeom prst="rect">
             <a:avLst/>
@@ -3938,20 +4157,67 @@
           <a:noFill/>
         </p:spPr>
         <p:txBody>
-          <a:bodyPr wrap="none">
+          <a:bodyPr wrap="square">
             <a:spAutoFit/>
           </a:bodyPr>
           <a:lstStyle/>
           <a:p>
             <a:pPr algn="ctr">
-              <a:defRPr sz="900">
-                <a:solidFill>
-                  <a:srgbClr val="404040"/>
-                </a:solidFill>
-              </a:defRPr>
-            </a:pPr>
-            <a:r>
-              <a:t>ICT — ENS Year 2 — English Department  •  Diapositive 6/10</a:t>
+              <a:defRPr sz="2800" b="1">
+                <a:solidFill>
+                  <a:srgbClr val="FFFFFF"/>
+                </a:solidFill>
+              </a:defRPr>
+            </a:pPr>
+            <a:r>
+              <a:t>🎓 Conclusion</a:t>
+            </a:r>
+          </a:p>
+        </p:txBody>
+      </p:sp>
+      <p:sp>
+        <p:nvSpPr>
+          <p:cNvPr id="3" name="TextBox 2"/>
+          <p:cNvSpPr txBox="1"/>
+          <p:nvPr/>
+        </p:nvSpPr>
+        <p:spPr>
+          <a:xfrm>
+            <a:off x="731520" y="2743200"/>
+            <a:ext cx="7680960" cy="1828800"/>
+          </a:xfrm>
+          <a:prstGeom prst="rect">
+            <a:avLst/>
+          </a:prstGeom>
+          <a:noFill/>
+        </p:spPr>
+        <p:txBody>
+          <a:bodyPr wrap="square">
+            <a:spAutoFit/>
+          </a:bodyPr>
+          <a:lstStyle/>
+          <a:p>
+            <a:pPr algn="ctr">
+              <a:defRPr sz="1800" b="0">
+                <a:solidFill>
+                  <a:srgbClr val="C5D9C7"/>
+                </a:solidFill>
+              </a:defRPr>
+            </a:pPr>
+            <a:r>
+              <a:t>Dr. BELACEL Madani</a:t>
+            </a:r>
+            <a:br/>
+            <a:r>
+              <a:t>Maître de Conférences B</a:t>
+            </a:r>
+            <a:br/>
+            <a:r>
+              <a:t>Université de Mostaganem</a:t>
+            </a:r>
+            <a:br/>
+            <a:r>
+              <a:t>madani.belacel@univ-mosta.dz</a:t>
             </a:r>
           </a:p>
         </p:txBody>
@@ -3961,15 +4227,20 @@
   <p:clrMapOvr>
     <a:masterClrMapping/>
   </p:clrMapOvr>
-  <p:transition spd="med">
-    <p:fade/>
-  </p:transition>
 </p:sld>
 </file>
 
-<file path=ppt/slides/slide7.xml><?xml version="1.0" encoding="utf-8"?>
+<file path=ppt/slides/slide2.xml><?xml version="1.0" encoding="utf-8"?>
 <p:sld xmlns:a="http://schemas.openxmlformats.org/drawingml/2006/main" xmlns:p="http://schemas.openxmlformats.org/presentationml/2006/main" xmlns:r="http://schemas.openxmlformats.org/officeDocument/2006/relationships">
   <p:cSld>
+    <p:bg>
+      <p:bgPr>
+        <a:solidFill>
+          <a:srgbClr val="FFFFFF"/>
+        </a:solidFill>
+        <a:effectLst/>
+      </p:bgPr>
+    </p:bg>
     <p:spTree>
       <p:nvGrpSpPr>
         <p:cNvPr id="1" name=""/>
@@ -3979,83 +4250,14 @@
       <p:grpSpPr/>
       <p:sp>
         <p:nvSpPr>
-          <p:cNvPr id="2" name="Title 1"/>
-          <p:cNvSpPr>
-            <a:spLocks noGrp="1"/>
-          </p:cNvSpPr>
-          <p:nvPr>
-            <p:ph type="title"/>
-          </p:nvPr>
-        </p:nvSpPr>
-        <p:spPr/>
-        <p:txBody>
-          <a:bodyPr/>
-          <a:lstStyle/>
-          <a:p>
-            <a:r>
-              <a:t>Placement portfolio</a:t>
-            </a:r>
-          </a:p>
-        </p:txBody>
-      </p:sp>
-      <p:sp>
-        <p:nvSpPr>
-          <p:cNvPr id="3" name="Content Placeholder 2"/>
-          <p:cNvSpPr>
-            <a:spLocks noGrp="1"/>
-          </p:cNvSpPr>
-          <p:nvPr>
-            <p:ph idx="1"/>
-          </p:nvPr>
-        </p:nvSpPr>
-        <p:spPr/>
-        <p:txBody>
-          <a:bodyPr/>
-          <a:lstStyle/>
-          <a:p>
-            <a:pPr>
-              <a:defRPr sz="2000"/>
-            </a:pPr>
-            <a:r>
-              <a:t>📂 Anonymised evidence</a:t>
-            </a:r>
-          </a:p>
-          <a:p>
-            <a:pPr>
-              <a:defRPr sz="2000"/>
-            </a:pPr>
-            <a:r>
-              <a:t>📂 Rolfe reflexivity</a:t>
-            </a:r>
-          </a:p>
-          <a:p>
-            <a:pPr>
-              <a:defRPr sz="2000"/>
-            </a:pPr>
-            <a:r>
-              <a:t>📂 10-min defense</a:t>
-            </a:r>
-          </a:p>
-          <a:p>
-            <a:pPr>
-              <a:defRPr sz="2000"/>
-            </a:pPr>
-            <a:r>
-              <a:t>📂 PDF export</a:t>
-            </a:r>
-          </a:p>
-        </p:txBody>
-      </p:sp>
-      <p:sp>
-        <p:nvSpPr>
-          <p:cNvPr id="4" name="TextBox 3"/>
+          <p:cNvPr id="2" name="TextBox 1"/>
           <p:cNvSpPr txBox="1"/>
           <p:nvPr/>
         </p:nvSpPr>
         <p:spPr>
           <a:xfrm>
-            <a:off x="365760" y="6446520"/>
-            <a:ext cx="8412480" cy="320040"/>
+            <a:off x="548640" y="365760"/>
+            <a:ext cx="7772400" cy="640080"/>
           </a:xfrm>
           <a:prstGeom prst="rect">
             <a:avLst/>
@@ -4063,20 +4265,88 @@
           <a:noFill/>
         </p:spPr>
         <p:txBody>
-          <a:bodyPr wrap="none">
+          <a:bodyPr wrap="square">
             <a:spAutoFit/>
           </a:bodyPr>
           <a:lstStyle/>
           <a:p>
-            <a:pPr algn="ctr">
-              <a:defRPr sz="900">
-                <a:solidFill>
-                  <a:srgbClr val="404040"/>
-                </a:solidFill>
-              </a:defRPr>
-            </a:pPr>
-            <a:r>
-              <a:t>ICT — ENS Year 2 — English Department  •  Diapositive 7/10</a:t>
+            <a:pPr algn="l">
+              <a:defRPr sz="2600" b="1">
+                <a:solidFill>
+                  <a:srgbClr val="1A5C33"/>
+                </a:solidFill>
+              </a:defRPr>
+            </a:pPr>
+            <a:r>
+              <a:t>🎯 Objectifs pédagogiques</a:t>
+            </a:r>
+          </a:p>
+        </p:txBody>
+      </p:sp>
+      <p:sp>
+        <p:nvSpPr>
+          <p:cNvPr id="3" name="TextBox 2"/>
+          <p:cNvSpPr txBox="1"/>
+          <p:nvPr/>
+        </p:nvSpPr>
+        <p:spPr>
+          <a:xfrm>
+            <a:off x="548640" y="1828800"/>
+            <a:ext cx="7772400" cy="4572000"/>
+          </a:xfrm>
+          <a:prstGeom prst="rect">
+            <a:avLst/>
+          </a:prstGeom>
+          <a:noFill/>
+        </p:spPr>
+        <p:txBody>
+          <a:bodyPr wrap="square">
+            <a:spAutoFit/>
+          </a:bodyPr>
+          <a:lstStyle/>
+          <a:p>
+            <a:pPr>
+              <a:spcAft>
+                <a:spcPts val="600"/>
+              </a:spcAft>
+              <a:defRPr sz="1500">
+                <a:solidFill>
+                  <a:srgbClr val="222222"/>
+                </a:solidFill>
+              </a:defRPr>
+            </a:pPr>
+            <a:r>
+              <a:t>• Comprendre les concepts clés</a:t>
+            </a:r>
+          </a:p>
+          <a:p>
+            <a:pPr>
+              <a:spcAft>
+                <a:spcPts val="600"/>
+              </a:spcAft>
+              <a:defRPr sz="1500">
+                <a:solidFill>
+                  <a:srgbClr val="222222"/>
+                </a:solidFill>
+              </a:defRPr>
+            </a:pPr>
+            <a:r>
+              <a:t>• Appliquer les compétences</a:t>
+            </a:r>
+          </a:p>
+          <a:p>
+            <a:pPr>
+              <a:spcAft>
+                <a:spcPts val="600"/>
+              </a:spcAft>
+              <a:defRPr sz="1500">
+                <a:solidFill>
+                  <a:srgbClr val="222222"/>
+                </a:solidFill>
+              </a:defRPr>
+            </a:pPr>
+            <a:r>
+              <a:t>• Évaluer les technologies</a:t>
             </a:r>
           </a:p>
         </p:txBody>
@@ -4086,15 +4356,20 @@
   <p:clrMapOvr>
     <a:masterClrMapping/>
   </p:clrMapOvr>
-  <p:transition spd="med">
-    <p:fade/>
-  </p:transition>
 </p:sld>
 </file>
 
-<file path=ppt/slides/slide8.xml><?xml version="1.0" encoding="utf-8"?>
+<file path=ppt/slides/slide3.xml><?xml version="1.0" encoding="utf-8"?>
 <p:sld xmlns:a="http://schemas.openxmlformats.org/drawingml/2006/main" xmlns:p="http://schemas.openxmlformats.org/presentationml/2006/main" xmlns:r="http://schemas.openxmlformats.org/officeDocument/2006/relationships">
   <p:cSld>
+    <p:bg>
+      <p:bgPr>
+        <a:solidFill>
+          <a:srgbClr val="FFFFFF"/>
+        </a:solidFill>
+        <a:effectLst/>
+      </p:bgPr>
+    </p:bg>
     <p:spTree>
       <p:nvGrpSpPr>
         <p:cNvPr id="1" name=""/>
@@ -4104,83 +4379,14 @@
       <p:grpSpPr/>
       <p:sp>
         <p:nvSpPr>
-          <p:cNvPr id="2" name="Title 1"/>
-          <p:cNvSpPr>
-            <a:spLocks noGrp="1"/>
-          </p:cNvSpPr>
-          <p:nvPr>
-            <p:ph type="title"/>
-          </p:nvPr>
-        </p:nvSpPr>
-        <p:spPr/>
-        <p:txBody>
-          <a:bodyPr/>
-          <a:lstStyle/>
-          <a:p>
-            <a:r>
-              <a:t>Hybrid &amp; video</a:t>
-            </a:r>
-          </a:p>
-        </p:txBody>
-      </p:sp>
-      <p:sp>
-        <p:nvSpPr>
-          <p:cNvPr id="3" name="Content Placeholder 2"/>
-          <p:cNvSpPr>
-            <a:spLocks noGrp="1"/>
-          </p:cNvSpPr>
-          <p:nvPr>
-            <p:ph idx="1"/>
-          </p:nvPr>
-        </p:nvSpPr>
-        <p:spPr/>
-        <p:txBody>
-          <a:bodyPr/>
-          <a:lstStyle/>
-          <a:p>
-            <a:pPr>
-              <a:defRPr sz="2000"/>
-            </a:pPr>
-            <a:r>
-              <a:t>🔄 Teams / BBB</a:t>
-            </a:r>
-          </a:p>
-          <a:p>
-            <a:pPr>
-              <a:defRPr sz="2000"/>
-            </a:pPr>
-            <a:r>
-              <a:t>🔄 Async prep</a:t>
-            </a:r>
-          </a:p>
-          <a:p>
-            <a:pPr>
-              <a:defRPr sz="2000"/>
-            </a:pPr>
-            <a:r>
-              <a:t>🔄 Co-teaching</a:t>
-            </a:r>
-          </a:p>
-          <a:p>
-            <a:pPr>
-              <a:defRPr sz="2000"/>
-            </a:pPr>
-            <a:r>
-              <a:t>🔄 Netiquette</a:t>
-            </a:r>
-          </a:p>
-        </p:txBody>
-      </p:sp>
-      <p:sp>
-        <p:nvSpPr>
-          <p:cNvPr id="4" name="TextBox 3"/>
+          <p:cNvPr id="2" name="TextBox 1"/>
           <p:cNvSpPr txBox="1"/>
           <p:nvPr/>
         </p:nvSpPr>
         <p:spPr>
           <a:xfrm>
-            <a:off x="365760" y="6446520"/>
-            <a:ext cx="8412480" cy="320040"/>
+            <a:off x="548640" y="365760"/>
+            <a:ext cx="7772400" cy="640080"/>
           </a:xfrm>
           <a:prstGeom prst="rect">
             <a:avLst/>
@@ -4188,20 +4394,193 @@
           <a:noFill/>
         </p:spPr>
         <p:txBody>
-          <a:bodyPr wrap="none">
+          <a:bodyPr wrap="square">
             <a:spAutoFit/>
           </a:bodyPr>
           <a:lstStyle/>
           <a:p>
-            <a:pPr algn="ctr">
-              <a:defRPr sz="900">
-                <a:solidFill>
-                  <a:srgbClr val="404040"/>
-                </a:solidFill>
-              </a:defRPr>
-            </a:pPr>
-            <a:r>
-              <a:t>ICT — ENS Year 2 — English Department  •  Diapositive 8/10</a:t>
+            <a:pPr algn="l">
+              <a:defRPr sz="2600" b="1">
+                <a:solidFill>
+                  <a:srgbClr val="1A5C33"/>
+                </a:solidFill>
+              </a:defRPr>
+            </a:pPr>
+            <a:r>
+              <a:t>📋 Plan du cours</a:t>
+            </a:r>
+          </a:p>
+        </p:txBody>
+      </p:sp>
+      <p:sp>
+        <p:nvSpPr>
+          <p:cNvPr id="3" name="TextBox 2"/>
+          <p:cNvSpPr txBox="1"/>
+          <p:nvPr/>
+        </p:nvSpPr>
+        <p:spPr>
+          <a:xfrm>
+            <a:off x="548640" y="1828800"/>
+            <a:ext cx="7772400" cy="4572000"/>
+          </a:xfrm>
+          <a:prstGeom prst="rect">
+            <a:avLst/>
+          </a:prstGeom>
+          <a:noFill/>
+        </p:spPr>
+        <p:txBody>
+          <a:bodyPr wrap="square">
+            <a:spAutoFit/>
+          </a:bodyPr>
+          <a:lstStyle/>
+          <a:p>
+            <a:pPr>
+              <a:spcAft>
+                <a:spcPts val="600"/>
+              </a:spcAft>
+              <a:defRPr sz="1600">
+                <a:solidFill>
+                  <a:srgbClr val="222222"/>
+                </a:solidFill>
+              </a:defRPr>
+            </a:pPr>
+            <a:r>
+              <a:t>• Learning Objectives</a:t>
+            </a:r>
+          </a:p>
+          <a:p>
+            <a:pPr>
+              <a:spcAft>
+                <a:spcPts val="600"/>
+              </a:spcAft>
+              <a:defRPr sz="1600">
+                <a:solidFill>
+                  <a:srgbClr val="222222"/>
+                </a:solidFill>
+              </a:defRPr>
+            </a:pPr>
+            <a:r>
+              <a:t>• 1. Definition and Evolution(10 min)</a:t>
+            </a:r>
+          </a:p>
+          <a:p>
+            <a:pPr>
+              <a:spcAft>
+                <a:spcPts val="600"/>
+              </a:spcAft>
+              <a:defRPr sz="1600">
+                <a:solidFill>
+                  <a:srgbClr val="222222"/>
+                </a:solidFill>
+              </a:defRPr>
+            </a:pPr>
+            <a:r>
+              <a:t>• 3. ICT and Pedagogy(20 min)</a:t>
+            </a:r>
+          </a:p>
+          <a:p>
+            <a:pPr>
+              <a:spcAft>
+                <a:spcPts val="600"/>
+              </a:spcAft>
+              <a:defRPr sz="1600">
+                <a:solidFill>
+                  <a:srgbClr val="222222"/>
+                </a:solidFill>
+              </a:defRPr>
+            </a:pPr>
+            <a:r>
+              <a:t>• 6. Teacher Digital Competencies(15 min)</a:t>
+            </a:r>
+          </a:p>
+          <a:p>
+            <a:pPr>
+              <a:spcAft>
+                <a:spcPts val="600"/>
+              </a:spcAft>
+              <a:defRPr sz="1600">
+                <a:solidFill>
+                  <a:srgbClr val="222222"/>
+                </a:solidFill>
+              </a:defRPr>
+            </a:pPr>
+            <a:r>
+              <a:t>• 7. Ethics and Security(10 min)</a:t>
+            </a:r>
+          </a:p>
+          <a:p>
+            <a:pPr>
+              <a:spcAft>
+                <a:spcPts val="600"/>
+              </a:spcAft>
+              <a:defRPr sz="1600">
+                <a:solidFill>
+                  <a:srgbClr val="222222"/>
+                </a:solidFill>
+              </a:defRPr>
+            </a:pPr>
+            <a:r>
+              <a:t>• 8. Conclusion(5 min)</a:t>
+            </a:r>
+          </a:p>
+          <a:p>
+            <a:pPr>
+              <a:spcAft>
+                <a:spcPts val="600"/>
+              </a:spcAft>
+              <a:defRPr sz="1600">
+                <a:solidFill>
+                  <a:srgbClr val="222222"/>
+                </a:solidFill>
+              </a:defRPr>
+            </a:pPr>
+            <a:r>
+              <a:t>• Course Plan</a:t>
+            </a:r>
+          </a:p>
+          <a:p>
+            <a:pPr>
+              <a:spcAft>
+                <a:spcPts val="600"/>
+              </a:spcAft>
+              <a:defRPr sz="1600">
+                <a:solidFill>
+                  <a:srgbClr val="222222"/>
+                </a:solidFill>
+              </a:defRPr>
+            </a:pPr>
+            <a:r>
+              <a:t>• 1. Introduction(10 min)</a:t>
+            </a:r>
+          </a:p>
+          <a:p>
+            <a:pPr>
+              <a:spcAft>
+                <a:spcPts val="600"/>
+              </a:spcAft>
+              <a:defRPr sz="1600">
+                <a:solidFill>
+                  <a:srgbClr val="222222"/>
+                </a:solidFill>
+              </a:defRPr>
+            </a:pPr>
+            <a:r>
+              <a:t>• 2. What is IT?(10 mins)</a:t>
+            </a:r>
+          </a:p>
+          <a:p>
+            <a:pPr>
+              <a:spcAft>
+                <a:spcPts val="600"/>
+              </a:spcAft>
+              <a:defRPr sz="1600">
+                <a:solidFill>
+                  <a:srgbClr val="222222"/>
+                </a:solidFill>
+              </a:defRPr>
+            </a:pPr>
+            <a:r>
+              <a:t>• 3. von Neumann model(15 min)</a:t>
             </a:r>
           </a:p>
         </p:txBody>
@@ -4211,15 +4590,20 @@
   <p:clrMapOvr>
     <a:masterClrMapping/>
   </p:clrMapOvr>
-  <p:transition spd="med">
-    <p:fade/>
-  </p:transition>
 </p:sld>
 </file>
 
-<file path=ppt/slides/slide9.xml><?xml version="1.0" encoding="utf-8"?>
+<file path=ppt/slides/slide4.xml><?xml version="1.0" encoding="utf-8"?>
 <p:sld xmlns:a="http://schemas.openxmlformats.org/drawingml/2006/main" xmlns:p="http://schemas.openxmlformats.org/presentationml/2006/main" xmlns:r="http://schemas.openxmlformats.org/officeDocument/2006/relationships">
   <p:cSld>
+    <p:bg>
+      <p:bgPr>
+        <a:solidFill>
+          <a:srgbClr val="FFFFFF"/>
+        </a:solidFill>
+        <a:effectLst/>
+      </p:bgPr>
+    </p:bg>
     <p:spTree>
       <p:nvGrpSpPr>
         <p:cNvPr id="1" name=""/>
@@ -4229,83 +4613,57 @@
       <p:grpSpPr/>
       <p:sp>
         <p:nvSpPr>
-          <p:cNvPr id="2" name="Title 1"/>
-          <p:cNvSpPr>
-            <a:spLocks noGrp="1"/>
-          </p:cNvSpPr>
-          <p:nvPr>
-            <p:ph type="title"/>
-          </p:nvPr>
-        </p:nvSpPr>
-        <p:spPr/>
-        <p:txBody>
-          <a:bodyPr/>
-          <a:lstStyle/>
-          <a:p>
-            <a:r>
-              <a:t>AI &amp; charter</a:t>
-            </a:r>
-          </a:p>
-        </p:txBody>
-      </p:sp>
-      <p:sp>
-        <p:nvSpPr>
-          <p:cNvPr id="3" name="Content Placeholder 2"/>
-          <p:cNvSpPr>
-            <a:spLocks noGrp="1"/>
-          </p:cNvSpPr>
-          <p:nvPr>
-            <p:ph idx="1"/>
-          </p:nvPr>
-        </p:nvSpPr>
-        <p:spPr/>
-        <p:txBody>
-          <a:bodyPr/>
-          <a:lstStyle/>
-          <a:p>
-            <a:pPr>
-              <a:defRPr sz="2000"/>
-            </a:pPr>
-            <a:r>
-              <a:t>🤖 Framed uses</a:t>
-            </a:r>
-          </a:p>
-          <a:p>
-            <a:pPr>
-              <a:defRPr sz="2000"/>
-            </a:pPr>
-            <a:r>
-              <a:t>🤖 Machine translation</a:t>
-            </a:r>
-          </a:p>
-          <a:p>
-            <a:pPr>
-              <a:defRPr sz="2000"/>
-            </a:pPr>
-            <a:r>
-              <a:t>🤖 Pupil training</a:t>
-            </a:r>
-          </a:p>
-          <a:p>
-            <a:pPr>
-              <a:defRPr sz="2000"/>
-            </a:pPr>
-            <a:r>
-              <a:t>🤖 Educational sanctions</a:t>
-            </a:r>
-          </a:p>
-        </p:txBody>
-      </p:sp>
-      <p:sp>
-        <p:nvSpPr>
-          <p:cNvPr id="4" name="TextBox 3"/>
+          <p:cNvPr id="2" name="Rectangle 1"/>
+          <p:cNvSpPr/>
+          <p:nvPr/>
+        </p:nvSpPr>
+        <p:spPr>
+          <a:xfrm>
+            <a:off x="0" y="0"/>
+            <a:ext cx="109728" cy="6858000"/>
+          </a:xfrm>
+          <a:prstGeom prst="rect">
+            <a:avLst/>
+          </a:prstGeom>
+          <a:solidFill>
+            <a:srgbClr val="2C6E49"/>
+          </a:solidFill>
+          <a:ln>
+            <a:noFill/>
+          </a:ln>
+        </p:spPr>
+        <p:style>
+          <a:lnRef idx="1">
+            <a:schemeClr val="accent1"/>
+          </a:lnRef>
+          <a:fillRef idx="3">
+            <a:schemeClr val="accent1"/>
+          </a:fillRef>
+          <a:effectRef idx="2">
+            <a:schemeClr val="accent1"/>
+          </a:effectRef>
+          <a:fontRef idx="minor">
+            <a:schemeClr val="lt1"/>
+          </a:fontRef>
+        </p:style>
+        <p:txBody>
+          <a:bodyPr rtlCol="0" anchor="ctr"/>
+          <a:lstStyle/>
+          <a:p>
+            <a:pPr algn="ctr"/>
+          </a:p>
+        </p:txBody>
+      </p:sp>
+      <p:sp>
+        <p:nvSpPr>
+          <p:cNvPr id="3" name="TextBox 2"/>
           <p:cNvSpPr txBox="1"/>
           <p:nvPr/>
         </p:nvSpPr>
         <p:spPr>
           <a:xfrm>
-            <a:off x="365760" y="6446520"/>
-            <a:ext cx="8412480" cy="320040"/>
+            <a:off x="457200" y="365760"/>
+            <a:ext cx="8229600" cy="640080"/>
           </a:xfrm>
           <a:prstGeom prst="rect">
             <a:avLst/>
@@ -4313,20 +4671,108 @@
           <a:noFill/>
         </p:spPr>
         <p:txBody>
-          <a:bodyPr wrap="none">
+          <a:bodyPr wrap="square">
             <a:spAutoFit/>
           </a:bodyPr>
           <a:lstStyle/>
           <a:p>
-            <a:pPr algn="ctr">
-              <a:defRPr sz="900">
-                <a:solidFill>
-                  <a:srgbClr val="404040"/>
-                </a:solidFill>
-              </a:defRPr>
-            </a:pPr>
-            <a:r>
-              <a:t>ICT — ENS Year 2 — English Department  •  Diapositive 9/10</a:t>
+            <a:pPr algn="l">
+              <a:defRPr sz="2200" b="1">
+                <a:solidFill>
+                  <a:srgbClr val="1A5C33"/>
+                </a:solidFill>
+              </a:defRPr>
+            </a:pPr>
+            <a:r>
+              <a:t>Learning Objectives</a:t>
+            </a:r>
+          </a:p>
+        </p:txBody>
+      </p:sp>
+      <p:sp>
+        <p:nvSpPr>
+          <p:cNvPr id="4" name="TextBox 3"/>
+          <p:cNvSpPr txBox="1"/>
+          <p:nvPr/>
+        </p:nvSpPr>
+        <p:spPr>
+          <a:xfrm>
+            <a:off x="457200" y="1371600"/>
+            <a:ext cx="7772400" cy="4572000"/>
+          </a:xfrm>
+          <a:prstGeom prst="rect">
+            <a:avLst/>
+          </a:prstGeom>
+          <a:noFill/>
+        </p:spPr>
+        <p:txBody>
+          <a:bodyPr wrap="square">
+            <a:spAutoFit/>
+          </a:bodyPr>
+          <a:lstStyle/>
+          <a:p>
+            <a:pPr>
+              <a:spcAft>
+                <a:spcPts val="600"/>
+              </a:spcAft>
+              <a:defRPr sz="1400">
+                <a:solidFill>
+                  <a:srgbClr val="222222"/>
+                </a:solidFill>
+              </a:defRPr>
+            </a:pPr>
+            <a:r>
+              <a:t>• Knowledge:- Define ICT and its evolution</a:t>
+            </a:r>
+            <a:br/>
+            <a:r>
+              <a:t>- Distinguish technical, information, and communication dimensions</a:t>
+            </a:r>
+            <a:br/>
+            <a:r>
+              <a:t>- Understand pedagogical ICT integration in language didactics</a:t>
+            </a:r>
+          </a:p>
+          <a:p>
+            <a:pPr>
+              <a:spcAft>
+                <a:spcPts val="600"/>
+              </a:spcAft>
+              <a:defRPr sz="1400">
+                <a:solidFill>
+                  <a:srgbClr val="222222"/>
+                </a:solidFill>
+              </a:defRPr>
+            </a:pPr>
+            <a:r>
+              <a:t>• Skills:- Use ICT tools to design teaching sequences</a:t>
+            </a:r>
+            <a:br/>
+            <a:r>
+              <a:t>- Evaluate and select digital resources for the classroom</a:t>
+            </a:r>
+            <a:br/>
+            <a:r>
+              <a:t>- Create interactive teaching materials</a:t>
+            </a:r>
+          </a:p>
+          <a:p>
+            <a:pPr>
+              <a:spcAft>
+                <a:spcPts val="600"/>
+              </a:spcAft>
+              <a:defRPr sz="1400">
+                <a:solidFill>
+                  <a:srgbClr val="222222"/>
+                </a:solidFill>
+              </a:defRPr>
+            </a:pPr>
+            <a:r>
+              <a:t>• Attitudes:- Adopt a digital mediator posture in the classroom</a:t>
+            </a:r>
+            <a:br/>
+            <a:r>
+              <a:t>- Develop critical thinking about tools and resources</a:t>
             </a:r>
           </a:p>
         </p:txBody>
@@ -4336,9 +4782,935 @@
   <p:clrMapOvr>
     <a:masterClrMapping/>
   </p:clrMapOvr>
-  <p:transition spd="med">
-    <p:fade/>
-  </p:transition>
+</p:sld>
+</file>
+
+<file path=ppt/slides/slide5.xml><?xml version="1.0" encoding="utf-8"?>
+<p:sld xmlns:a="http://schemas.openxmlformats.org/drawingml/2006/main" xmlns:p="http://schemas.openxmlformats.org/presentationml/2006/main" xmlns:r="http://schemas.openxmlformats.org/officeDocument/2006/relationships">
+  <p:cSld>
+    <p:bg>
+      <p:bgPr>
+        <a:solidFill>
+          <a:srgbClr val="FFFFFF"/>
+        </a:solidFill>
+        <a:effectLst/>
+      </p:bgPr>
+    </p:bg>
+    <p:spTree>
+      <p:nvGrpSpPr>
+        <p:cNvPr id="1" name=""/>
+        <p:cNvGrpSpPr/>
+        <p:nvPr/>
+      </p:nvGrpSpPr>
+      <p:grpSpPr/>
+      <p:sp>
+        <p:nvSpPr>
+          <p:cNvPr id="2" name="Rectangle 1"/>
+          <p:cNvSpPr/>
+          <p:nvPr/>
+        </p:nvSpPr>
+        <p:spPr>
+          <a:xfrm>
+            <a:off x="0" y="0"/>
+            <a:ext cx="109728" cy="6858000"/>
+          </a:xfrm>
+          <a:prstGeom prst="rect">
+            <a:avLst/>
+          </a:prstGeom>
+          <a:solidFill>
+            <a:srgbClr val="2C6E49"/>
+          </a:solidFill>
+          <a:ln>
+            <a:noFill/>
+          </a:ln>
+        </p:spPr>
+        <p:style>
+          <a:lnRef idx="1">
+            <a:schemeClr val="accent1"/>
+          </a:lnRef>
+          <a:fillRef idx="3">
+            <a:schemeClr val="accent1"/>
+          </a:fillRef>
+          <a:effectRef idx="2">
+            <a:schemeClr val="accent1"/>
+          </a:effectRef>
+          <a:fontRef idx="minor">
+            <a:schemeClr val="lt1"/>
+          </a:fontRef>
+        </p:style>
+        <p:txBody>
+          <a:bodyPr rtlCol="0" anchor="ctr"/>
+          <a:lstStyle/>
+          <a:p>
+            <a:pPr algn="ctr"/>
+          </a:p>
+        </p:txBody>
+      </p:sp>
+      <p:sp>
+        <p:nvSpPr>
+          <p:cNvPr id="3" name="TextBox 2"/>
+          <p:cNvSpPr txBox="1"/>
+          <p:nvPr/>
+        </p:nvSpPr>
+        <p:spPr>
+          <a:xfrm>
+            <a:off x="457200" y="365760"/>
+            <a:ext cx="8229600" cy="640080"/>
+          </a:xfrm>
+          <a:prstGeom prst="rect">
+            <a:avLst/>
+          </a:prstGeom>
+          <a:noFill/>
+        </p:spPr>
+        <p:txBody>
+          <a:bodyPr wrap="square">
+            <a:spAutoFit/>
+          </a:bodyPr>
+          <a:lstStyle/>
+          <a:p>
+            <a:pPr algn="l">
+              <a:defRPr sz="2200" b="1">
+                <a:solidFill>
+                  <a:srgbClr val="1A5C33"/>
+                </a:solidFill>
+              </a:defRPr>
+            </a:pPr>
+            <a:r>
+              <a:t>1. Definition and Evolution(10 min)</a:t>
+            </a:r>
+          </a:p>
+        </p:txBody>
+      </p:sp>
+      <p:sp>
+        <p:nvSpPr>
+          <p:cNvPr id="4" name="TextBox 3"/>
+          <p:cNvSpPr txBox="1"/>
+          <p:nvPr/>
+        </p:nvSpPr>
+        <p:spPr>
+          <a:xfrm>
+            <a:off x="457200" y="1371600"/>
+            <a:ext cx="7772400" cy="4572000"/>
+          </a:xfrm>
+          <a:prstGeom prst="rect">
+            <a:avLst/>
+          </a:prstGeom>
+          <a:noFill/>
+        </p:spPr>
+        <p:txBody>
+          <a:bodyPr wrap="square">
+            <a:spAutoFit/>
+          </a:bodyPr>
+          <a:lstStyle/>
+          <a:p>
+            <a:pPr>
+              <a:spcAft>
+                <a:spcPts val="600"/>
+              </a:spcAft>
+              <a:defRPr sz="1400">
+                <a:solidFill>
+                  <a:srgbClr val="222222"/>
+                </a:solidFill>
+              </a:defRPr>
+            </a:pPr>
+            <a:r>
+              <a:t>• ICTcovers digital tools and systems for creating, processing, storing, transmitting, and sharing information.</a:t>
+            </a:r>
+          </a:p>
+          <a:p>
+            <a:pPr>
+              <a:spcAft>
+                <a:spcPts val="600"/>
+              </a:spcAft>
+              <a:defRPr sz="1400">
+                <a:solidFill>
+                  <a:srgbClr val="222222"/>
+                </a:solidFill>
+              </a:defRPr>
+            </a:pPr>
+            <a:r>
+              <a:t>• Evolution:NTIC (1990-2005) → ICT (2005-present) → AI and EdTech (2020+).</a:t>
+            </a:r>
+          </a:p>
+          <a:p>
+            <a:pPr>
+              <a:spcAft>
+                <a:spcPts val="600"/>
+              </a:spcAft>
+              <a:defRPr sz="1400">
+                <a:solidFill>
+                  <a:srgbClr val="222222"/>
+                </a:solidFill>
+              </a:defRPr>
+            </a:pPr>
+            <a:r>
+              <a:t>• For the future teacher:ICT are not just personal tools butpedagogical instrumentsto integrate into teaching practice.</a:t>
+            </a:r>
+          </a:p>
+        </p:txBody>
+      </p:sp>
+    </p:spTree>
+  </p:cSld>
+  <p:clrMapOvr>
+    <a:masterClrMapping/>
+  </p:clrMapOvr>
+</p:sld>
+</file>
+
+<file path=ppt/slides/slide6.xml><?xml version="1.0" encoding="utf-8"?>
+<p:sld xmlns:a="http://schemas.openxmlformats.org/drawingml/2006/main" xmlns:p="http://schemas.openxmlformats.org/presentationml/2006/main" xmlns:r="http://schemas.openxmlformats.org/officeDocument/2006/relationships">
+  <p:cSld>
+    <p:bg>
+      <p:bgPr>
+        <a:solidFill>
+          <a:srgbClr val="FFFFFF"/>
+        </a:solidFill>
+        <a:effectLst/>
+      </p:bgPr>
+    </p:bg>
+    <p:spTree>
+      <p:nvGrpSpPr>
+        <p:cNvPr id="1" name=""/>
+        <p:cNvGrpSpPr/>
+        <p:nvPr/>
+      </p:nvGrpSpPr>
+      <p:grpSpPr/>
+      <p:sp>
+        <p:nvSpPr>
+          <p:cNvPr id="2" name="Rectangle 1"/>
+          <p:cNvSpPr/>
+          <p:nvPr/>
+        </p:nvSpPr>
+        <p:spPr>
+          <a:xfrm>
+            <a:off x="0" y="0"/>
+            <a:ext cx="109728" cy="6858000"/>
+          </a:xfrm>
+          <a:prstGeom prst="rect">
+            <a:avLst/>
+          </a:prstGeom>
+          <a:solidFill>
+            <a:srgbClr val="2C6E49"/>
+          </a:solidFill>
+          <a:ln>
+            <a:noFill/>
+          </a:ln>
+        </p:spPr>
+        <p:style>
+          <a:lnRef idx="1">
+            <a:schemeClr val="accent1"/>
+          </a:lnRef>
+          <a:fillRef idx="3">
+            <a:schemeClr val="accent1"/>
+          </a:fillRef>
+          <a:effectRef idx="2">
+            <a:schemeClr val="accent1"/>
+          </a:effectRef>
+          <a:fontRef idx="minor">
+            <a:schemeClr val="lt1"/>
+          </a:fontRef>
+        </p:style>
+        <p:txBody>
+          <a:bodyPr rtlCol="0" anchor="ctr"/>
+          <a:lstStyle/>
+          <a:p>
+            <a:pPr algn="ctr"/>
+          </a:p>
+        </p:txBody>
+      </p:sp>
+      <p:sp>
+        <p:nvSpPr>
+          <p:cNvPr id="3" name="TextBox 2"/>
+          <p:cNvSpPr txBox="1"/>
+          <p:nvPr/>
+        </p:nvSpPr>
+        <p:spPr>
+          <a:xfrm>
+            <a:off x="457200" y="365760"/>
+            <a:ext cx="8229600" cy="640080"/>
+          </a:xfrm>
+          <a:prstGeom prst="rect">
+            <a:avLst/>
+          </a:prstGeom>
+          <a:noFill/>
+        </p:spPr>
+        <p:txBody>
+          <a:bodyPr wrap="square">
+            <a:spAutoFit/>
+          </a:bodyPr>
+          <a:lstStyle/>
+          <a:p>
+            <a:pPr algn="l">
+              <a:defRPr sz="2200" b="1">
+                <a:solidFill>
+                  <a:srgbClr val="1A5C33"/>
+                </a:solidFill>
+              </a:defRPr>
+            </a:pPr>
+            <a:r>
+              <a:t>3. ICT and Pedagogy(20 min)</a:t>
+            </a:r>
+          </a:p>
+        </p:txBody>
+      </p:sp>
+      <p:sp>
+        <p:nvSpPr>
+          <p:cNvPr id="4" name="TextBox 3"/>
+          <p:cNvSpPr txBox="1"/>
+          <p:nvPr/>
+        </p:nvSpPr>
+        <p:spPr>
+          <a:xfrm>
+            <a:off x="457200" y="1371600"/>
+            <a:ext cx="7772400" cy="4572000"/>
+          </a:xfrm>
+          <a:prstGeom prst="rect">
+            <a:avLst/>
+          </a:prstGeom>
+          <a:noFill/>
+        </p:spPr>
+        <p:txBody>
+          <a:bodyPr wrap="square">
+            <a:spAutoFit/>
+          </a:bodyPr>
+          <a:lstStyle/>
+          <a:p>
+            <a:pPr>
+              <a:spcAft>
+                <a:spcPts val="600"/>
+              </a:spcAft>
+              <a:defRPr sz="1400">
+                <a:solidFill>
+                  <a:srgbClr val="222222"/>
+                </a:solidFill>
+              </a:defRPr>
+            </a:pPr>
+            <a:r>
+              <a:t>• Why integrate ICT in language teaching?- Learner motivation and engagement</a:t>
+            </a:r>
+            <a:br/>
+            <a:r>
+              <a:t>- Access to authentic resources (videos, articles, podcasts)</a:t>
+            </a:r>
+            <a:br/>
+            <a:r>
+              <a:t>- Individualized learning paths</a:t>
+            </a:r>
+            <a:br/>
+            <a:r>
+              <a:t>- Autonomy development</a:t>
+            </a:r>
+          </a:p>
+          <a:p>
+            <a:pPr>
+              <a:spcAft>
+                <a:spcPts val="600"/>
+              </a:spcAft>
+              <a:defRPr sz="1400">
+                <a:solidFill>
+                  <a:srgbClr val="222222"/>
+                </a:solidFill>
+              </a:defRPr>
+            </a:pPr>
+            <a:r>
+              <a:t>• Application areas:- Listening: podcasts, audio recording</a:t>
+            </a:r>
+            <a:br/>
+            <a:r>
+              <a:t>- Writing: blogs, wikis, collaborative editing</a:t>
+            </a:r>
+            <a:br/>
+            <a:r>
+              <a:t>- Interaction: videoconferencing with partner classes</a:t>
+            </a:r>
+            <a:br/>
+            <a:r>
+              <a:t>- Grammar/vocabulary: interactive exercises, quizzes</a:t>
+            </a:r>
+          </a:p>
+        </p:txBody>
+      </p:sp>
+    </p:spTree>
+  </p:cSld>
+  <p:clrMapOvr>
+    <a:masterClrMapping/>
+  </p:clrMapOvr>
+</p:sld>
+</file>
+
+<file path=ppt/slides/slide7.xml><?xml version="1.0" encoding="utf-8"?>
+<p:sld xmlns:a="http://schemas.openxmlformats.org/drawingml/2006/main" xmlns:p="http://schemas.openxmlformats.org/presentationml/2006/main" xmlns:r="http://schemas.openxmlformats.org/officeDocument/2006/relationships">
+  <p:cSld>
+    <p:bg>
+      <p:bgPr>
+        <a:solidFill>
+          <a:srgbClr val="FFFFFF"/>
+        </a:solidFill>
+        <a:effectLst/>
+      </p:bgPr>
+    </p:bg>
+    <p:spTree>
+      <p:nvGrpSpPr>
+        <p:cNvPr id="1" name=""/>
+        <p:cNvGrpSpPr/>
+        <p:nvPr/>
+      </p:nvGrpSpPr>
+      <p:grpSpPr/>
+      <p:sp>
+        <p:nvSpPr>
+          <p:cNvPr id="2" name="Rectangle 1"/>
+          <p:cNvSpPr/>
+          <p:nvPr/>
+        </p:nvSpPr>
+        <p:spPr>
+          <a:xfrm>
+            <a:off x="0" y="0"/>
+            <a:ext cx="109728" cy="6858000"/>
+          </a:xfrm>
+          <a:prstGeom prst="rect">
+            <a:avLst/>
+          </a:prstGeom>
+          <a:solidFill>
+            <a:srgbClr val="2C6E49"/>
+          </a:solidFill>
+          <a:ln>
+            <a:noFill/>
+          </a:ln>
+        </p:spPr>
+        <p:style>
+          <a:lnRef idx="1">
+            <a:schemeClr val="accent1"/>
+          </a:lnRef>
+          <a:fillRef idx="3">
+            <a:schemeClr val="accent1"/>
+          </a:fillRef>
+          <a:effectRef idx="2">
+            <a:schemeClr val="accent1"/>
+          </a:effectRef>
+          <a:fontRef idx="minor">
+            <a:schemeClr val="lt1"/>
+          </a:fontRef>
+        </p:style>
+        <p:txBody>
+          <a:bodyPr rtlCol="0" anchor="ctr"/>
+          <a:lstStyle/>
+          <a:p>
+            <a:pPr algn="ctr"/>
+          </a:p>
+        </p:txBody>
+      </p:sp>
+      <p:sp>
+        <p:nvSpPr>
+          <p:cNvPr id="3" name="TextBox 2"/>
+          <p:cNvSpPr txBox="1"/>
+          <p:nvPr/>
+        </p:nvSpPr>
+        <p:spPr>
+          <a:xfrm>
+            <a:off x="457200" y="365760"/>
+            <a:ext cx="8229600" cy="640080"/>
+          </a:xfrm>
+          <a:prstGeom prst="rect">
+            <a:avLst/>
+          </a:prstGeom>
+          <a:noFill/>
+        </p:spPr>
+        <p:txBody>
+          <a:bodyPr wrap="square">
+            <a:spAutoFit/>
+          </a:bodyPr>
+          <a:lstStyle/>
+          <a:p>
+            <a:pPr algn="l">
+              <a:defRPr sz="2200" b="1">
+                <a:solidFill>
+                  <a:srgbClr val="1A5C33"/>
+                </a:solidFill>
+              </a:defRPr>
+            </a:pPr>
+            <a:r>
+              <a:t>6. Teacher Digital Competencies(15 min)</a:t>
+            </a:r>
+          </a:p>
+        </p:txBody>
+      </p:sp>
+      <p:sp>
+        <p:nvSpPr>
+          <p:cNvPr id="4" name="TextBox 3"/>
+          <p:cNvSpPr txBox="1"/>
+          <p:nvPr/>
+        </p:nvSpPr>
+        <p:spPr>
+          <a:xfrm>
+            <a:off x="457200" y="1371600"/>
+            <a:ext cx="7772400" cy="4572000"/>
+          </a:xfrm>
+          <a:prstGeom prst="rect">
+            <a:avLst/>
+          </a:prstGeom>
+          <a:noFill/>
+        </p:spPr>
+        <p:txBody>
+          <a:bodyPr wrap="square">
+            <a:spAutoFit/>
+          </a:bodyPr>
+          <a:lstStyle/>
+          <a:p>
+            <a:pPr>
+              <a:spcAft>
+                <a:spcPts val="600"/>
+              </a:spcAft>
+              <a:defRPr sz="1400">
+                <a:solidFill>
+                  <a:srgbClr val="222222"/>
+                </a:solidFill>
+              </a:defRPr>
+            </a:pPr>
+            <a:r>
+              <a:t>• Design sequences integrating digital tools</a:t>
+            </a:r>
+          </a:p>
+          <a:p>
+            <a:pPr>
+              <a:spcAft>
+                <a:spcPts val="600"/>
+              </a:spcAft>
+              <a:defRPr sz="1400">
+                <a:solidFill>
+                  <a:srgbClr val="222222"/>
+                </a:solidFill>
+              </a:defRPr>
+            </a:pPr>
+            <a:r>
+              <a:t>• Implement collaborative online activities</a:t>
+            </a:r>
+          </a:p>
+          <a:p>
+            <a:pPr>
+              <a:spcAft>
+                <a:spcPts val="600"/>
+              </a:spcAft>
+              <a:defRPr sz="1400">
+                <a:solidFill>
+                  <a:srgbClr val="222222"/>
+                </a:solidFill>
+              </a:defRPr>
+            </a:pPr>
+            <a:r>
+              <a:t>• Assess with digital tools</a:t>
+            </a:r>
+          </a:p>
+          <a:p>
+            <a:pPr>
+              <a:spcAft>
+                <a:spcPts val="600"/>
+              </a:spcAft>
+              <a:defRPr sz="1400">
+                <a:solidFill>
+                  <a:srgbClr val="222222"/>
+                </a:solidFill>
+              </a:defRPr>
+            </a:pPr>
+            <a:r>
+              <a:t>• Ensure security and ethics</a:t>
+            </a:r>
+          </a:p>
+          <a:p>
+            <a:pPr>
+              <a:spcAft>
+                <a:spcPts val="600"/>
+              </a:spcAft>
+              <a:defRPr sz="1400">
+                <a:solidFill>
+                  <a:srgbClr val="222222"/>
+                </a:solidFill>
+              </a:defRPr>
+            </a:pPr>
+            <a:r>
+              <a:t>• Develop professional monitoring</a:t>
+            </a:r>
+          </a:p>
+        </p:txBody>
+      </p:sp>
+    </p:spTree>
+  </p:cSld>
+  <p:clrMapOvr>
+    <a:masterClrMapping/>
+  </p:clrMapOvr>
+</p:sld>
+</file>
+
+<file path=ppt/slides/slide8.xml><?xml version="1.0" encoding="utf-8"?>
+<p:sld xmlns:a="http://schemas.openxmlformats.org/drawingml/2006/main" xmlns:p="http://schemas.openxmlformats.org/presentationml/2006/main" xmlns:r="http://schemas.openxmlformats.org/officeDocument/2006/relationships">
+  <p:cSld>
+    <p:bg>
+      <p:bgPr>
+        <a:solidFill>
+          <a:srgbClr val="FFFFFF"/>
+        </a:solidFill>
+        <a:effectLst/>
+      </p:bgPr>
+    </p:bg>
+    <p:spTree>
+      <p:nvGrpSpPr>
+        <p:cNvPr id="1" name=""/>
+        <p:cNvGrpSpPr/>
+        <p:nvPr/>
+      </p:nvGrpSpPr>
+      <p:grpSpPr/>
+      <p:sp>
+        <p:nvSpPr>
+          <p:cNvPr id="2" name="Rectangle 1"/>
+          <p:cNvSpPr/>
+          <p:nvPr/>
+        </p:nvSpPr>
+        <p:spPr>
+          <a:xfrm>
+            <a:off x="0" y="0"/>
+            <a:ext cx="109728" cy="6858000"/>
+          </a:xfrm>
+          <a:prstGeom prst="rect">
+            <a:avLst/>
+          </a:prstGeom>
+          <a:solidFill>
+            <a:srgbClr val="2C6E49"/>
+          </a:solidFill>
+          <a:ln>
+            <a:noFill/>
+          </a:ln>
+        </p:spPr>
+        <p:style>
+          <a:lnRef idx="1">
+            <a:schemeClr val="accent1"/>
+          </a:lnRef>
+          <a:fillRef idx="3">
+            <a:schemeClr val="accent1"/>
+          </a:fillRef>
+          <a:effectRef idx="2">
+            <a:schemeClr val="accent1"/>
+          </a:effectRef>
+          <a:fontRef idx="minor">
+            <a:schemeClr val="lt1"/>
+          </a:fontRef>
+        </p:style>
+        <p:txBody>
+          <a:bodyPr rtlCol="0" anchor="ctr"/>
+          <a:lstStyle/>
+          <a:p>
+            <a:pPr algn="ctr"/>
+          </a:p>
+        </p:txBody>
+      </p:sp>
+      <p:sp>
+        <p:nvSpPr>
+          <p:cNvPr id="3" name="TextBox 2"/>
+          <p:cNvSpPr txBox="1"/>
+          <p:nvPr/>
+        </p:nvSpPr>
+        <p:spPr>
+          <a:xfrm>
+            <a:off x="457200" y="365760"/>
+            <a:ext cx="8229600" cy="640080"/>
+          </a:xfrm>
+          <a:prstGeom prst="rect">
+            <a:avLst/>
+          </a:prstGeom>
+          <a:noFill/>
+        </p:spPr>
+        <p:txBody>
+          <a:bodyPr wrap="square">
+            <a:spAutoFit/>
+          </a:bodyPr>
+          <a:lstStyle/>
+          <a:p>
+            <a:pPr algn="l">
+              <a:defRPr sz="2200" b="1">
+                <a:solidFill>
+                  <a:srgbClr val="1A5C33"/>
+                </a:solidFill>
+              </a:defRPr>
+            </a:pPr>
+            <a:r>
+              <a:t>7. Ethics and Security(10 min)</a:t>
+            </a:r>
+          </a:p>
+        </p:txBody>
+      </p:sp>
+      <p:sp>
+        <p:nvSpPr>
+          <p:cNvPr id="4" name="TextBox 3"/>
+          <p:cNvSpPr txBox="1"/>
+          <p:nvPr/>
+        </p:nvSpPr>
+        <p:spPr>
+          <a:xfrm>
+            <a:off x="457200" y="1371600"/>
+            <a:ext cx="7772400" cy="4572000"/>
+          </a:xfrm>
+          <a:prstGeom prst="rect">
+            <a:avLst/>
+          </a:prstGeom>
+          <a:noFill/>
+        </p:spPr>
+        <p:txBody>
+          <a:bodyPr wrap="square">
+            <a:spAutoFit/>
+          </a:bodyPr>
+          <a:lstStyle/>
+          <a:p>
+            <a:pPr>
+              <a:spcAft>
+                <a:spcPts val="600"/>
+              </a:spcAft>
+              <a:defRPr sz="1400">
+                <a:solidFill>
+                  <a:srgbClr val="222222"/>
+                </a:solidFill>
+              </a:defRPr>
+            </a:pPr>
+            <a:r>
+              <a:t>• GDPR compliance:protect student data</a:t>
+            </a:r>
+          </a:p>
+          <a:p>
+            <a:pPr>
+              <a:spcAft>
+                <a:spcPts val="600"/>
+              </a:spcAft>
+              <a:defRPr sz="1400">
+                <a:solidFill>
+                  <a:srgbClr val="222222"/>
+                </a:solidFill>
+              </a:defRPr>
+            </a:pPr>
+            <a:r>
+              <a:t>• Copyright:use open-licensed resources (Creative Commons)</a:t>
+            </a:r>
+          </a:p>
+          <a:p>
+            <a:pPr>
+              <a:spcAft>
+                <a:spcPts val="600"/>
+              </a:spcAft>
+              <a:defRPr sz="1400">
+                <a:solidFill>
+                  <a:srgbClr val="222222"/>
+                </a:solidFill>
+              </a:defRPr>
+            </a:pPr>
+            <a:r>
+              <a:t>• Cyberbullying:prevention in class</a:t>
+            </a:r>
+          </a:p>
+          <a:p>
+            <a:pPr>
+              <a:spcAft>
+                <a:spcPts val="600"/>
+              </a:spcAft>
+              <a:defRPr sz="1400">
+                <a:solidFill>
+                  <a:srgbClr val="222222"/>
+                </a:solidFill>
+              </a:defRPr>
+            </a:pPr>
+            <a:r>
+              <a:t>• Digital identity:the teacher as a role model</a:t>
+            </a:r>
+          </a:p>
+        </p:txBody>
+      </p:sp>
+    </p:spTree>
+  </p:cSld>
+  <p:clrMapOvr>
+    <a:masterClrMapping/>
+  </p:clrMapOvr>
+</p:sld>
+</file>
+
+<file path=ppt/slides/slide9.xml><?xml version="1.0" encoding="utf-8"?>
+<p:sld xmlns:a="http://schemas.openxmlformats.org/drawingml/2006/main" xmlns:p="http://schemas.openxmlformats.org/presentationml/2006/main" xmlns:r="http://schemas.openxmlformats.org/officeDocument/2006/relationships">
+  <p:cSld>
+    <p:bg>
+      <p:bgPr>
+        <a:solidFill>
+          <a:srgbClr val="FFFFFF"/>
+        </a:solidFill>
+        <a:effectLst/>
+      </p:bgPr>
+    </p:bg>
+    <p:spTree>
+      <p:nvGrpSpPr>
+        <p:cNvPr id="1" name=""/>
+        <p:cNvGrpSpPr/>
+        <p:nvPr/>
+      </p:nvGrpSpPr>
+      <p:grpSpPr/>
+      <p:sp>
+        <p:nvSpPr>
+          <p:cNvPr id="2" name="Rectangle 1"/>
+          <p:cNvSpPr/>
+          <p:nvPr/>
+        </p:nvSpPr>
+        <p:spPr>
+          <a:xfrm>
+            <a:off x="0" y="0"/>
+            <a:ext cx="109728" cy="6858000"/>
+          </a:xfrm>
+          <a:prstGeom prst="rect">
+            <a:avLst/>
+          </a:prstGeom>
+          <a:solidFill>
+            <a:srgbClr val="2C6E49"/>
+          </a:solidFill>
+          <a:ln>
+            <a:noFill/>
+          </a:ln>
+        </p:spPr>
+        <p:style>
+          <a:lnRef idx="1">
+            <a:schemeClr val="accent1"/>
+          </a:lnRef>
+          <a:fillRef idx="3">
+            <a:schemeClr val="accent1"/>
+          </a:fillRef>
+          <a:effectRef idx="2">
+            <a:schemeClr val="accent1"/>
+          </a:effectRef>
+          <a:fontRef idx="minor">
+            <a:schemeClr val="lt1"/>
+          </a:fontRef>
+        </p:style>
+        <p:txBody>
+          <a:bodyPr rtlCol="0" anchor="ctr"/>
+          <a:lstStyle/>
+          <a:p>
+            <a:pPr algn="ctr"/>
+          </a:p>
+        </p:txBody>
+      </p:sp>
+      <p:sp>
+        <p:nvSpPr>
+          <p:cNvPr id="3" name="TextBox 2"/>
+          <p:cNvSpPr txBox="1"/>
+          <p:nvPr/>
+        </p:nvSpPr>
+        <p:spPr>
+          <a:xfrm>
+            <a:off x="457200" y="365760"/>
+            <a:ext cx="8229600" cy="640080"/>
+          </a:xfrm>
+          <a:prstGeom prst="rect">
+            <a:avLst/>
+          </a:prstGeom>
+          <a:noFill/>
+        </p:spPr>
+        <p:txBody>
+          <a:bodyPr wrap="square">
+            <a:spAutoFit/>
+          </a:bodyPr>
+          <a:lstStyle/>
+          <a:p>
+            <a:pPr algn="l">
+              <a:defRPr sz="2200" b="1">
+                <a:solidFill>
+                  <a:srgbClr val="1A5C33"/>
+                </a:solidFill>
+              </a:defRPr>
+            </a:pPr>
+            <a:r>
+              <a:t>8. Conclusion(5 min)</a:t>
+            </a:r>
+          </a:p>
+        </p:txBody>
+      </p:sp>
+      <p:sp>
+        <p:nvSpPr>
+          <p:cNvPr id="4" name="TextBox 3"/>
+          <p:cNvSpPr txBox="1"/>
+          <p:nvPr/>
+        </p:nvSpPr>
+        <p:spPr>
+          <a:xfrm>
+            <a:off x="457200" y="1371600"/>
+            <a:ext cx="7772400" cy="4572000"/>
+          </a:xfrm>
+          <a:prstGeom prst="rect">
+            <a:avLst/>
+          </a:prstGeom>
+          <a:noFill/>
+        </p:spPr>
+        <p:txBody>
+          <a:bodyPr wrap="square">
+            <a:spAutoFit/>
+          </a:bodyPr>
+          <a:lstStyle/>
+          <a:p>
+            <a:pPr>
+              <a:spcAft>
+                <a:spcPts val="600"/>
+              </a:spcAft>
+              <a:defRPr sz="1400">
+                <a:solidFill>
+                  <a:srgbClr val="222222"/>
+                </a:solidFill>
+              </a:defRPr>
+            </a:pPr>
+            <a:r>
+              <a:t>• ICT are apedagogical leverfor language teachers</a:t>
+            </a:r>
+          </a:p>
+          <a:p>
+            <a:pPr>
+              <a:spcAft>
+                <a:spcPts val="600"/>
+              </a:spcAft>
+              <a:defRPr sz="1400">
+                <a:solidFill>
+                  <a:srgbClr val="222222"/>
+                </a:solidFill>
+              </a:defRPr>
+            </a:pPr>
+            <a:r>
+              <a:t>• Integration must bethoughtful(SAMR model)</a:t>
+            </a:r>
+          </a:p>
+          <a:p>
+            <a:pPr>
+              <a:spcAft>
+                <a:spcPts val="600"/>
+              </a:spcAft>
+              <a:defRPr sz="1400">
+                <a:solidFill>
+                  <a:srgbClr val="222222"/>
+                </a:solidFill>
+              </a:defRPr>
+            </a:pPr>
+            <a:r>
+              <a:t>• Future teachers must developdigital competencies</a:t>
+            </a:r>
+          </a:p>
+          <a:p>
+            <a:pPr>
+              <a:spcAft>
+                <a:spcPts val="600"/>
+              </a:spcAft>
+              <a:defRPr sz="1400">
+                <a:solidFill>
+                  <a:srgbClr val="222222"/>
+                </a:solidFill>
+              </a:defRPr>
+            </a:pPr>
+            <a:r>
+              <a:t>• TD 01(1h30) — analyzing ICT tools for the classroom.</a:t>
+            </a:r>
+          </a:p>
+        </p:txBody>
+      </p:sp>
+    </p:spTree>
+  </p:cSld>
+  <p:clrMapOvr>
+    <a:masterClrMapping/>
+  </p:clrMapOvr>
 </p:sld>
 </file>
 

--- a/cours/Module TIC/Département Anglais/ENS 2ème année/Cours_TIC_ENS_2eme_annee_EN.pptx
+++ b/cours/Module TIC/Département Anglais/ENS 2ème année/Cours_TIC_ENS_2eme_annee_EN.pptx
@@ -2850,7 +2850,7 @@
           <a:solidFill>
             <a:schemeClr val="tx1"/>
           </a:solidFill>
-          <a:latin typeface="+mj-lt"/>
+          <a:latin typeface="Poppins"/>
           <a:ea typeface="+mj-ea"/>
           <a:cs typeface="+mj-cs"/>
         </a:defRPr>
@@ -2867,7 +2867,7 @@
           <a:solidFill>
             <a:schemeClr val="tx1"/>
           </a:solidFill>
-          <a:latin typeface="+mn-lt"/>
+          <a:latin typeface="Poppins"/>
           <a:ea typeface="+mn-ea"/>
           <a:cs typeface="+mn-cs"/>
         </a:defRPr>
@@ -2882,7 +2882,7 @@
           <a:solidFill>
             <a:schemeClr val="tx1"/>
           </a:solidFill>
-          <a:latin typeface="+mn-lt"/>
+          <a:latin typeface="Poppins"/>
           <a:ea typeface="+mn-ea"/>
           <a:cs typeface="+mn-cs"/>
         </a:defRPr>
@@ -2897,7 +2897,7 @@
           <a:solidFill>
             <a:schemeClr val="tx1"/>
           </a:solidFill>
-          <a:latin typeface="+mn-lt"/>
+          <a:latin typeface="Poppins"/>
           <a:ea typeface="+mn-ea"/>
           <a:cs typeface="+mn-cs"/>
         </a:defRPr>
@@ -2912,7 +2912,7 @@
           <a:solidFill>
             <a:schemeClr val="tx1"/>
           </a:solidFill>
-          <a:latin typeface="+mn-lt"/>
+          <a:latin typeface="Poppins"/>
           <a:ea typeface="+mn-ea"/>
           <a:cs typeface="+mn-cs"/>
         </a:defRPr>
@@ -2927,7 +2927,7 @@
           <a:solidFill>
             <a:schemeClr val="tx1"/>
           </a:solidFill>
-          <a:latin typeface="+mn-lt"/>
+          <a:latin typeface="Poppins"/>
           <a:ea typeface="+mn-ea"/>
           <a:cs typeface="+mn-cs"/>
         </a:defRPr>
@@ -2942,7 +2942,7 @@
           <a:solidFill>
             <a:schemeClr val="tx1"/>
           </a:solidFill>
-          <a:latin typeface="+mn-lt"/>
+          <a:latin typeface="Poppins"/>
           <a:ea typeface="+mn-ea"/>
           <a:cs typeface="+mn-cs"/>
         </a:defRPr>
@@ -2957,7 +2957,7 @@
           <a:solidFill>
             <a:schemeClr val="tx1"/>
           </a:solidFill>
-          <a:latin typeface="+mn-lt"/>
+          <a:latin typeface="Poppins"/>
           <a:ea typeface="+mn-ea"/>
           <a:cs typeface="+mn-cs"/>
         </a:defRPr>
@@ -2972,7 +2972,7 @@
           <a:solidFill>
             <a:schemeClr val="tx1"/>
           </a:solidFill>
-          <a:latin typeface="+mn-lt"/>
+          <a:latin typeface="Poppins"/>
           <a:ea typeface="+mn-ea"/>
           <a:cs typeface="+mn-cs"/>
         </a:defRPr>
@@ -2987,7 +2987,7 @@
           <a:solidFill>
             <a:schemeClr val="tx1"/>
           </a:solidFill>
-          <a:latin typeface="+mn-lt"/>
+          <a:latin typeface="Poppins"/>
           <a:ea typeface="+mn-ea"/>
           <a:cs typeface="+mn-cs"/>
         </a:defRPr>
@@ -3002,7 +3002,7 @@
           <a:solidFill>
             <a:schemeClr val="tx1"/>
           </a:solidFill>
-          <a:latin typeface="+mn-lt"/>
+          <a:latin typeface="Poppins"/>
           <a:ea typeface="+mn-ea"/>
           <a:cs typeface="+mn-cs"/>
         </a:defRPr>
@@ -3012,7 +3012,7 @@
           <a:solidFill>
             <a:schemeClr val="tx1"/>
           </a:solidFill>
-          <a:latin typeface="+mn-lt"/>
+          <a:latin typeface="Poppins"/>
           <a:ea typeface="+mn-ea"/>
           <a:cs typeface="+mn-cs"/>
         </a:defRPr>
@@ -3022,7 +3022,7 @@
           <a:solidFill>
             <a:schemeClr val="tx1"/>
           </a:solidFill>
-          <a:latin typeface="+mn-lt"/>
+          <a:latin typeface="Poppins"/>
           <a:ea typeface="+mn-ea"/>
           <a:cs typeface="+mn-cs"/>
         </a:defRPr>
@@ -3032,7 +3032,7 @@
           <a:solidFill>
             <a:schemeClr val="tx1"/>
           </a:solidFill>
-          <a:latin typeface="+mn-lt"/>
+          <a:latin typeface="Poppins"/>
           <a:ea typeface="+mn-ea"/>
           <a:cs typeface="+mn-cs"/>
         </a:defRPr>
@@ -3042,7 +3042,7 @@
           <a:solidFill>
             <a:schemeClr val="tx1"/>
           </a:solidFill>
-          <a:latin typeface="+mn-lt"/>
+          <a:latin typeface="Poppins"/>
           <a:ea typeface="+mn-ea"/>
           <a:cs typeface="+mn-cs"/>
         </a:defRPr>
@@ -3052,7 +3052,7 @@
           <a:solidFill>
             <a:schemeClr val="tx1"/>
           </a:solidFill>
-          <a:latin typeface="+mn-lt"/>
+          <a:latin typeface="Poppins"/>
           <a:ea typeface="+mn-ea"/>
           <a:cs typeface="+mn-cs"/>
         </a:defRPr>
@@ -3062,7 +3062,7 @@
           <a:solidFill>
             <a:schemeClr val="tx1"/>
           </a:solidFill>
-          <a:latin typeface="+mn-lt"/>
+          <a:latin typeface="Poppins"/>
           <a:ea typeface="+mn-ea"/>
           <a:cs typeface="+mn-cs"/>
         </a:defRPr>
@@ -3072,7 +3072,7 @@
           <a:solidFill>
             <a:schemeClr val="tx1"/>
           </a:solidFill>
-          <a:latin typeface="+mn-lt"/>
+          <a:latin typeface="Poppins"/>
           <a:ea typeface="+mn-ea"/>
           <a:cs typeface="+mn-cs"/>
         </a:defRPr>
@@ -3082,7 +3082,7 @@
           <a:solidFill>
             <a:schemeClr val="tx1"/>
           </a:solidFill>
-          <a:latin typeface="+mn-lt"/>
+          <a:latin typeface="Poppins"/>
           <a:ea typeface="+mn-ea"/>
           <a:cs typeface="+mn-cs"/>
         </a:defRPr>
@@ -3097,9 +3097,7 @@
   <p:cSld>
     <p:bg>
       <p:bgPr>
-        <a:solidFill>
-          <a:srgbClr val="1A5C33"/>
-        </a:solidFill>
+        <a:solidFill>val="006847"/&gt;</a:solidFill>
         <a:effectLst/>
       </p:bgPr>
     </p:bg>
@@ -3134,9 +3132,7 @@
           <a:p>
             <a:pPr algn="ctr">
               <a:defRPr sz="3200" b="1">
-                <a:solidFill>
-                  <a:srgbClr val="FFFFFF"/>
-                </a:solidFill>
+                <a:solidFill>val="FFFFFF"/&gt;</a:solidFill>
               </a:defRPr>
             </a:pPr>
             <a:r>
@@ -3169,9 +3165,7 @@
           <a:p>
             <a:pPr algn="ctr">
               <a:defRPr sz="2000" b="0">
-                <a:solidFill>
-                  <a:srgbClr val="C5D9C7"/>
-                </a:solidFill>
+                <a:solidFill>val="DFE5EA"/&gt;</a:solidFill>
               </a:defRPr>
             </a:pPr>
             <a:r>
@@ -3204,13 +3198,52 @@
           <a:p>
             <a:pPr algn="ctr">
               <a:defRPr sz="1600" b="0">
+                <a:solidFill>val="B7C9BE"/&gt;</a:solidFill>
+              </a:defRPr>
+            </a:pPr>
+            <a:r>
+              <a:t>Université de Mostaganem — MCB</a:t>
+            </a:r>
+          </a:p>
+        </p:txBody>
+      </p:sp>
+      <p:sp>
+        <p:nvSpPr>
+          <p:cNvPr id="990001" name="Pied de page FLE"/>
+          <p:cNvSpPr>
+            <a:spLocks noGrp="1"/>
+          </p:cNvSpPr>
+          <p:nvPr/>
+        </p:nvSpPr>
+        <p:spPr>
+          <a:xfrm>
+            <a:off x="2880360" y="914400"/>
+            <a:ext cx="4572000" cy="274320"/>
+          </a:xfrm>
+          <a:prstGeom prst="rect">
+            <a:avLst/>
+          </a:prstGeom>
+        </p:spPr>
+        <p:txBody>
+          <a:bodyPr anchor="b"/>
+          <a:lstStyle/>
+          <a:p>
+            <a:pPr algn="r">
+              <a:defRPr sz="900">
                 <a:solidFill>
-                  <a:srgbClr val="A0CFA0"/>
+                  <a:srgbClr val="9AA7B6"/>
                 </a:solidFill>
-              </a:defRPr>
-            </a:pPr>
-            <a:r>
-              <a:t>Université de Mostaganem — MCB</a:t>
+                <a:latin typeface="Poppins"/>
+              </a:defRPr>
+            </a:pPr>
+            <a:r>
+              <a:rPr lang="fr-FR" sz="900">
+                <a:solidFill>
+                  <a:srgbClr val="9AA7B6"/>
+                </a:solidFill>
+                <a:latin typeface="Poppins"/>
+              </a:rPr>
+              <a:t>Université de Mostaganem — Dr. Madani BELACEL</a:t>
             </a:r>
           </a:p>
         </p:txBody>
@@ -3228,9 +3261,7 @@
   <p:cSld>
     <p:bg>
       <p:bgPr>
-        <a:solidFill>
-          <a:srgbClr val="FFFFFF"/>
-        </a:solidFill>
+        <a:solidFill>val="FFFFFF"/&gt;</a:solidFill>
         <a:effectLst/>
       </p:bgPr>
     </p:bg>
@@ -3255,9 +3286,7 @@
           <a:prstGeom prst="rect">
             <a:avLst/>
           </a:prstGeom>
-          <a:solidFill>
-            <a:srgbClr val="2C6E49"/>
-          </a:solidFill>
+          <a:solidFill>val="00875B"/&gt;</a:solidFill>
           <a:ln>
             <a:noFill/>
           </a:ln>
@@ -3308,9 +3337,7 @@
           <a:p>
             <a:pPr algn="l">
               <a:defRPr sz="2200" b="1">
-                <a:solidFill>
-                  <a:srgbClr val="1A5C33"/>
-                </a:solidFill>
+                <a:solidFill>val="006847"/&gt;</a:solidFill>
               </a:defRPr>
             </a:pPr>
             <a:r>
@@ -3346,9 +3373,7 @@
                 <a:spcPts val="600"/>
               </a:spcAft>
               <a:defRPr sz="1400">
-                <a:solidFill>
-                  <a:srgbClr val="222222"/>
-                </a:solidFill>
+                <a:solidFill>val="22344A"/&gt;</a:solidFill>
               </a:defRPr>
             </a:pPr>
             <a:r>
@@ -3361,9 +3386,7 @@
                 <a:spcPts val="600"/>
               </a:spcAft>
               <a:defRPr sz="1400">
-                <a:solidFill>
-                  <a:srgbClr val="222222"/>
-                </a:solidFill>
+                <a:solidFill>val="22344A"/&gt;</a:solidFill>
               </a:defRPr>
             </a:pPr>
             <a:r>
@@ -3376,9 +3399,7 @@
                 <a:spcPts val="600"/>
               </a:spcAft>
               <a:defRPr sz="1400">
-                <a:solidFill>
-                  <a:srgbClr val="222222"/>
-                </a:solidFill>
+                <a:solidFill>val="22344A"/&gt;</a:solidFill>
               </a:defRPr>
             </a:pPr>
             <a:r>
@@ -3391,9 +3412,7 @@
                 <a:spcPts val="600"/>
               </a:spcAft>
               <a:defRPr sz="1400">
-                <a:solidFill>
-                  <a:srgbClr val="222222"/>
-                </a:solidFill>
+                <a:solidFill>val="22344A"/&gt;</a:solidFill>
               </a:defRPr>
             </a:pPr>
             <a:r>
@@ -3406,9 +3425,7 @@
                 <a:spcPts val="600"/>
               </a:spcAft>
               <a:defRPr sz="1400">
-                <a:solidFill>
-                  <a:srgbClr val="222222"/>
-                </a:solidFill>
+                <a:solidFill>val="22344A"/&gt;</a:solidFill>
               </a:defRPr>
             </a:pPr>
             <a:r>
@@ -3421,9 +3438,7 @@
                 <a:spcPts val="600"/>
               </a:spcAft>
               <a:defRPr sz="1400">
-                <a:solidFill>
-                  <a:srgbClr val="222222"/>
-                </a:solidFill>
+                <a:solidFill>val="22344A"/&gt;</a:solidFill>
               </a:defRPr>
             </a:pPr>
             <a:r>
@@ -3436,9 +3451,7 @@
                 <a:spcPts val="600"/>
               </a:spcAft>
               <a:defRPr sz="1400">
-                <a:solidFill>
-                  <a:srgbClr val="222222"/>
-                </a:solidFill>
+                <a:solidFill>val="22344A"/&gt;</a:solidFill>
               </a:defRPr>
             </a:pPr>
             <a:r>
@@ -3451,13 +3464,52 @@
                 <a:spcPts val="600"/>
               </a:spcAft>
               <a:defRPr sz="1400">
+                <a:solidFill>val="22344A"/&gt;</a:solidFill>
+              </a:defRPr>
+            </a:pPr>
+            <a:r>
+              <a:t>• Conclusion and transition to Windows</a:t>
+            </a:r>
+          </a:p>
+        </p:txBody>
+      </p:sp>
+      <p:sp>
+        <p:nvSpPr>
+          <p:cNvPr id="990001" name="Pied de page FLE"/>
+          <p:cNvSpPr>
+            <a:spLocks noGrp="1"/>
+          </p:cNvSpPr>
+          <p:nvPr/>
+        </p:nvSpPr>
+        <p:spPr>
+          <a:xfrm>
+            <a:off x="-228600" y="6400800"/>
+            <a:ext cx="109728" cy="274320"/>
+          </a:xfrm>
+          <a:prstGeom prst="rect">
+            <a:avLst/>
+          </a:prstGeom>
+        </p:spPr>
+        <p:txBody>
+          <a:bodyPr anchor="b"/>
+          <a:lstStyle/>
+          <a:p>
+            <a:pPr algn="r">
+              <a:defRPr sz="900">
                 <a:solidFill>
-                  <a:srgbClr val="222222"/>
+                  <a:srgbClr val="9AA7B6"/>
                 </a:solidFill>
-              </a:defRPr>
-            </a:pPr>
-            <a:r>
-              <a:t>• Conclusion and transition to Windows</a:t>
+                <a:latin typeface="Poppins"/>
+              </a:defRPr>
+            </a:pPr>
+            <a:r>
+              <a:rPr lang="fr-FR" sz="900">
+                <a:solidFill>
+                  <a:srgbClr val="9AA7B6"/>
+                </a:solidFill>
+                <a:latin typeface="Poppins"/>
+              </a:rPr>
+              <a:t>Université de Mostaganem — Dr. Madani BELACEL</a:t>
             </a:r>
           </a:p>
         </p:txBody>
@@ -3475,9 +3527,7 @@
   <p:cSld>
     <p:bg>
       <p:bgPr>
-        <a:solidFill>
-          <a:srgbClr val="FFFFFF"/>
-        </a:solidFill>
+        <a:solidFill>val="FFFFFF"/&gt;</a:solidFill>
         <a:effectLst/>
       </p:bgPr>
     </p:bg>
@@ -3502,9 +3552,7 @@
           <a:prstGeom prst="rect">
             <a:avLst/>
           </a:prstGeom>
-          <a:solidFill>
-            <a:srgbClr val="2C6E49"/>
-          </a:solidFill>
+          <a:solidFill>val="00875B"/&gt;</a:solidFill>
           <a:ln>
             <a:noFill/>
           </a:ln>
@@ -3555,9 +3603,7 @@
           <a:p>
             <a:pPr algn="l">
               <a:defRPr sz="2200" b="1">
-                <a:solidFill>
-                  <a:srgbClr val="1A5C33"/>
-                </a:solidFill>
+                <a:solidFill>val="006847"/&gt;</a:solidFill>
               </a:defRPr>
             </a:pPr>
             <a:r>
@@ -3593,9 +3639,7 @@
                 <a:spcPts val="600"/>
               </a:spcAft>
               <a:defRPr sz="1400">
-                <a:solidFill>
-                  <a:srgbClr val="222222"/>
-                </a:solidFill>
+                <a:solidFill>val="22344A"/&gt;</a:solidFill>
               </a:defRPr>
             </a:pPr>
             <a:r>
@@ -3608,13 +3652,52 @@
                 <a:spcPts val="600"/>
               </a:spcAft>
               <a:defRPr sz="1400">
+                <a:solidFill>val="22344A"/&gt;</a:solidFill>
+              </a:defRPr>
+            </a:pPr>
+            <a:r>
+              <a:t>• The computer has becomethe main university working instrument.</a:t>
+            </a:r>
+          </a:p>
+        </p:txBody>
+      </p:sp>
+      <p:sp>
+        <p:nvSpPr>
+          <p:cNvPr id="990001" name="Pied de page FLE"/>
+          <p:cNvSpPr>
+            <a:spLocks noGrp="1"/>
+          </p:cNvSpPr>
+          <p:nvPr/>
+        </p:nvSpPr>
+        <p:spPr>
+          <a:xfrm>
+            <a:off x="-228600" y="6400800"/>
+            <a:ext cx="109728" cy="274320"/>
+          </a:xfrm>
+          <a:prstGeom prst="rect">
+            <a:avLst/>
+          </a:prstGeom>
+        </p:spPr>
+        <p:txBody>
+          <a:bodyPr anchor="b"/>
+          <a:lstStyle/>
+          <a:p>
+            <a:pPr algn="r">
+              <a:defRPr sz="900">
                 <a:solidFill>
-                  <a:srgbClr val="222222"/>
+                  <a:srgbClr val="9AA7B6"/>
                 </a:solidFill>
-              </a:defRPr>
-            </a:pPr>
-            <a:r>
-              <a:t>• The computer has becomethe main university working instrument.</a:t>
+                <a:latin typeface="Poppins"/>
+              </a:defRPr>
+            </a:pPr>
+            <a:r>
+              <a:rPr lang="fr-FR" sz="900">
+                <a:solidFill>
+                  <a:srgbClr val="9AA7B6"/>
+                </a:solidFill>
+                <a:latin typeface="Poppins"/>
+              </a:rPr>
+              <a:t>Université de Mostaganem — Dr. Madani BELACEL</a:t>
             </a:r>
           </a:p>
         </p:txBody>
@@ -3632,9 +3715,7 @@
   <p:cSld>
     <p:bg>
       <p:bgPr>
-        <a:solidFill>
-          <a:srgbClr val="FFFFFF"/>
-        </a:solidFill>
+        <a:solidFill>val="FFFFFF"/&gt;</a:solidFill>
         <a:effectLst/>
       </p:bgPr>
     </p:bg>
@@ -3659,9 +3740,7 @@
           <a:prstGeom prst="rect">
             <a:avLst/>
           </a:prstGeom>
-          <a:solidFill>
-            <a:srgbClr val="2C6E49"/>
-          </a:solidFill>
+          <a:solidFill>val="00875B"/&gt;</a:solidFill>
           <a:ln>
             <a:noFill/>
           </a:ln>
@@ -3712,9 +3791,7 @@
           <a:p>
             <a:pPr algn="l">
               <a:defRPr sz="2200" b="1">
-                <a:solidFill>
-                  <a:srgbClr val="1A5C33"/>
-                </a:solidFill>
+                <a:solidFill>val="006847"/&gt;</a:solidFill>
               </a:defRPr>
             </a:pPr>
             <a:r>
@@ -3750,9 +3827,7 @@
                 <a:spcPts val="600"/>
               </a:spcAft>
               <a:defRPr sz="1400">
-                <a:solidFill>
-                  <a:srgbClr val="222222"/>
-                </a:solidFill>
+                <a:solidFill>val="22344A"/&gt;</a:solidFill>
               </a:defRPr>
             </a:pPr>
             <a:r>
@@ -3765,13 +3840,52 @@
                 <a:spcPts val="600"/>
               </a:spcAft>
               <a:defRPr sz="1400">
+                <a:solidFill>val="22344A"/&gt;</a:solidFill>
+              </a:defRPr>
+            </a:pPr>
+            <a:r>
+              <a:t>• Userapproach: understand enough to use the computer well in your studies.</a:t>
+            </a:r>
+          </a:p>
+        </p:txBody>
+      </p:sp>
+      <p:sp>
+        <p:nvSpPr>
+          <p:cNvPr id="990001" name="Pied de page FLE"/>
+          <p:cNvSpPr>
+            <a:spLocks noGrp="1"/>
+          </p:cNvSpPr>
+          <p:nvPr/>
+        </p:nvSpPr>
+        <p:spPr>
+          <a:xfrm>
+            <a:off x="-228600" y="6400800"/>
+            <a:ext cx="109728" cy="274320"/>
+          </a:xfrm>
+          <a:prstGeom prst="rect">
+            <a:avLst/>
+          </a:prstGeom>
+        </p:spPr>
+        <p:txBody>
+          <a:bodyPr anchor="b"/>
+          <a:lstStyle/>
+          <a:p>
+            <a:pPr algn="r">
+              <a:defRPr sz="900">
                 <a:solidFill>
-                  <a:srgbClr val="222222"/>
+                  <a:srgbClr val="9AA7B6"/>
                 </a:solidFill>
-              </a:defRPr>
-            </a:pPr>
-            <a:r>
-              <a:t>• Userapproach: understand enough to use the computer well in your studies.</a:t>
+                <a:latin typeface="Poppins"/>
+              </a:defRPr>
+            </a:pPr>
+            <a:r>
+              <a:rPr lang="fr-FR" sz="900">
+                <a:solidFill>
+                  <a:srgbClr val="9AA7B6"/>
+                </a:solidFill>
+                <a:latin typeface="Poppins"/>
+              </a:rPr>
+              <a:t>Université de Mostaganem — Dr. Madani BELACEL</a:t>
             </a:r>
           </a:p>
         </p:txBody>
@@ -3789,9 +3903,7 @@
   <p:cSld>
     <p:bg>
       <p:bgPr>
-        <a:solidFill>
-          <a:srgbClr val="E8F0E9"/>
-        </a:solidFill>
+        <a:solidFill>val="F4F6F8"/&gt;</a:solidFill>
         <a:effectLst/>
       </p:bgPr>
     </p:bg>
@@ -3826,9 +3938,7 @@
           <a:p>
             <a:pPr algn="ctr">
               <a:defRPr sz="2600" b="1">
-                <a:solidFill>
-                  <a:srgbClr val="1A5C33"/>
-                </a:solidFill>
+                <a:solidFill>val="006847"/&gt;</a:solidFill>
               </a:defRPr>
             </a:pPr>
             <a:r>
@@ -3864,9 +3974,7 @@
                 <a:spcPts val="600"/>
               </a:spcAft>
               <a:defRPr sz="1600">
-                <a:solidFill>
-                  <a:srgbClr val="222222"/>
-                </a:solidFill>
+                <a:solidFill>val="22344A"/&gt;</a:solidFill>
               </a:defRPr>
             </a:pPr>
             <a:r>
@@ -3887,9 +3995,7 @@
                 <a:spcPts val="600"/>
               </a:spcAft>
               <a:defRPr sz="1600">
-                <a:solidFill>
-                  <a:srgbClr val="222222"/>
-                </a:solidFill>
+                <a:solidFill>val="22344A"/&gt;</a:solidFill>
               </a:defRPr>
             </a:pPr>
             <a:r>
@@ -3902,9 +4008,7 @@
                 <a:spcPts val="600"/>
               </a:spcAft>
               <a:defRPr sz="1600">
-                <a:solidFill>
-                  <a:srgbClr val="222222"/>
-                </a:solidFill>
+                <a:solidFill>val="22344A"/&gt;</a:solidFill>
               </a:defRPr>
             </a:pPr>
             <a:r>
@@ -3929,9 +4033,7 @@
                 <a:spcPts val="600"/>
               </a:spcAft>
               <a:defRPr sz="1600">
-                <a:solidFill>
-                  <a:srgbClr val="222222"/>
-                </a:solidFill>
+                <a:solidFill>val="22344A"/&gt;</a:solidFill>
               </a:defRPr>
             </a:pPr>
             <a:r>
@@ -3944,13 +4046,52 @@
                 <a:spcPts val="600"/>
               </a:spcAft>
               <a:defRPr sz="1600">
+                <a:solidFill>val="22344A"/&gt;</a:solidFill>
+              </a:defRPr>
+            </a:pPr>
+            <a:r>
+              <a:t>• GDPR compliance:protect student data</a:t>
+            </a:r>
+          </a:p>
+        </p:txBody>
+      </p:sp>
+      <p:sp>
+        <p:nvSpPr>
+          <p:cNvPr id="990001" name="Pied de page FLE"/>
+          <p:cNvSpPr>
+            <a:spLocks noGrp="1"/>
+          </p:cNvSpPr>
+          <p:nvPr/>
+        </p:nvSpPr>
+        <p:spPr>
+          <a:xfrm>
+            <a:off x="2971800" y="182880"/>
+            <a:ext cx="4572000" cy="274320"/>
+          </a:xfrm>
+          <a:prstGeom prst="rect">
+            <a:avLst/>
+          </a:prstGeom>
+        </p:spPr>
+        <p:txBody>
+          <a:bodyPr anchor="b"/>
+          <a:lstStyle/>
+          <a:p>
+            <a:pPr algn="r">
+              <a:defRPr sz="900">
                 <a:solidFill>
-                  <a:srgbClr val="222222"/>
+                  <a:srgbClr val="9AA7B6"/>
                 </a:solidFill>
-              </a:defRPr>
-            </a:pPr>
-            <a:r>
-              <a:t>• GDPR compliance:protect student data</a:t>
+                <a:latin typeface="Poppins"/>
+              </a:defRPr>
+            </a:pPr>
+            <a:r>
+              <a:rPr lang="fr-FR" sz="900">
+                <a:solidFill>
+                  <a:srgbClr val="9AA7B6"/>
+                </a:solidFill>
+                <a:latin typeface="Poppins"/>
+              </a:rPr>
+              <a:t>Université de Mostaganem — Dr. Madani BELACEL</a:t>
             </a:r>
           </a:p>
         </p:txBody>
@@ -3968,9 +4109,7 @@
   <p:cSld>
     <p:bg>
       <p:bgPr>
-        <a:solidFill>
-          <a:srgbClr val="FFFFFF"/>
-        </a:solidFill>
+        <a:solidFill>val="FFFFFF"/&gt;</a:solidFill>
         <a:effectLst/>
       </p:bgPr>
     </p:bg>
@@ -4005,9 +4144,7 @@
           <a:p>
             <a:pPr algn="ctr">
               <a:defRPr sz="2600" b="1">
-                <a:solidFill>
-                  <a:srgbClr val="1A5C33"/>
-                </a:solidFill>
+                <a:solidFill>val="006847"/&gt;</a:solidFill>
               </a:defRPr>
             </a:pPr>
             <a:r>
@@ -4043,9 +4180,7 @@
                 <a:spcPts val="600"/>
               </a:spcAft>
               <a:defRPr sz="1500">
-                <a:solidFill>
-                  <a:srgbClr val="222222"/>
-                </a:solidFill>
+                <a:solidFill>val="22344A"/&gt;</a:solidFill>
               </a:defRPr>
             </a:pPr>
             <a:r>
@@ -4058,9 +4193,7 @@
                 <a:spcPts val="600"/>
               </a:spcAft>
               <a:defRPr sz="1500">
-                <a:solidFill>
-                  <a:srgbClr val="222222"/>
-                </a:solidFill>
+                <a:solidFill>val="22344A"/&gt;</a:solidFill>
               </a:defRPr>
             </a:pPr>
             <a:r>
@@ -4073,9 +4206,7 @@
                 <a:spcPts val="600"/>
               </a:spcAft>
               <a:defRPr sz="1500">
-                <a:solidFill>
-                  <a:srgbClr val="222222"/>
-                </a:solidFill>
+                <a:solidFill>val="22344A"/&gt;</a:solidFill>
               </a:defRPr>
             </a:pPr>
             <a:r>
@@ -4088,9 +4219,7 @@
                 <a:spcPts val="600"/>
               </a:spcAft>
               <a:defRPr sz="1500">
-                <a:solidFill>
-                  <a:srgbClr val="222222"/>
-                </a:solidFill>
+                <a:solidFill>val="22344A"/&gt;</a:solidFill>
               </a:defRPr>
             </a:pPr>
             <a:r>
@@ -4103,13 +4232,52 @@
                 <a:spcPts val="600"/>
               </a:spcAft>
               <a:defRPr sz="1500">
+                <a:solidFill>val="22344A"/&gt;</a:solidFill>
+              </a:defRPr>
+            </a:pPr>
+            <a:r>
+              <a:t>• Préparer une courte présentation orale</a:t>
+            </a:r>
+          </a:p>
+        </p:txBody>
+      </p:sp>
+      <p:sp>
+        <p:nvSpPr>
+          <p:cNvPr id="990001" name="Pied de page FLE"/>
+          <p:cNvSpPr>
+            <a:spLocks noGrp="1"/>
+          </p:cNvSpPr>
+          <p:nvPr/>
+        </p:nvSpPr>
+        <p:spPr>
+          <a:xfrm>
+            <a:off x="2971800" y="182880"/>
+            <a:ext cx="4572000" cy="274320"/>
+          </a:xfrm>
+          <a:prstGeom prst="rect">
+            <a:avLst/>
+          </a:prstGeom>
+        </p:spPr>
+        <p:txBody>
+          <a:bodyPr anchor="b"/>
+          <a:lstStyle/>
+          <a:p>
+            <a:pPr algn="r">
+              <a:defRPr sz="900">
                 <a:solidFill>
-                  <a:srgbClr val="222222"/>
+                  <a:srgbClr val="9AA7B6"/>
                 </a:solidFill>
-              </a:defRPr>
-            </a:pPr>
-            <a:r>
-              <a:t>• Préparer une courte présentation orale</a:t>
+                <a:latin typeface="Poppins"/>
+              </a:defRPr>
+            </a:pPr>
+            <a:r>
+              <a:rPr lang="fr-FR" sz="900">
+                <a:solidFill>
+                  <a:srgbClr val="9AA7B6"/>
+                </a:solidFill>
+                <a:latin typeface="Poppins"/>
+              </a:rPr>
+              <a:t>Université de Mostaganem — Dr. Madani BELACEL</a:t>
             </a:r>
           </a:p>
         </p:txBody>
@@ -4127,9 +4295,7 @@
   <p:cSld>
     <p:bg>
       <p:bgPr>
-        <a:solidFill>
-          <a:srgbClr val="1A5C33"/>
-        </a:solidFill>
+        <a:solidFill>val="006847"/&gt;</a:solidFill>
         <a:effectLst/>
       </p:bgPr>
     </p:bg>
@@ -4164,9 +4330,7 @@
           <a:p>
             <a:pPr algn="ctr">
               <a:defRPr sz="2800" b="1">
-                <a:solidFill>
-                  <a:srgbClr val="FFFFFF"/>
-                </a:solidFill>
+                <a:solidFill>val="FFFFFF"/&gt;</a:solidFill>
               </a:defRPr>
             </a:pPr>
             <a:r>
@@ -4199,25 +4363,64 @@
           <a:p>
             <a:pPr algn="ctr">
               <a:defRPr sz="1800" b="0">
+                <a:solidFill>val="DFE5EA"/&gt;</a:solidFill>
+              </a:defRPr>
+            </a:pPr>
+            <a:r>
+              <a:t>Dr. BELACEL Madani</a:t>
+            </a:r>
+            <a:br/>
+            <a:r>
+              <a:t>Maître de Conférences B</a:t>
+            </a:r>
+            <a:br/>
+            <a:r>
+              <a:t>Université de Mostaganem</a:t>
+            </a:r>
+            <a:br/>
+            <a:r>
+              <a:t>madani.belacel@univ-mosta.dz</a:t>
+            </a:r>
+          </a:p>
+        </p:txBody>
+      </p:sp>
+      <p:sp>
+        <p:nvSpPr>
+          <p:cNvPr id="990001" name="Pied de page FLE"/>
+          <p:cNvSpPr>
+            <a:spLocks noGrp="1"/>
+          </p:cNvSpPr>
+          <p:nvPr/>
+        </p:nvSpPr>
+        <p:spPr>
+          <a:xfrm>
+            <a:off x="2880360" y="457200"/>
+            <a:ext cx="4572000" cy="274320"/>
+          </a:xfrm>
+          <a:prstGeom prst="rect">
+            <a:avLst/>
+          </a:prstGeom>
+        </p:spPr>
+        <p:txBody>
+          <a:bodyPr anchor="b"/>
+          <a:lstStyle/>
+          <a:p>
+            <a:pPr algn="r">
+              <a:defRPr sz="900">
                 <a:solidFill>
-                  <a:srgbClr val="C5D9C7"/>
+                  <a:srgbClr val="9AA7B6"/>
                 </a:solidFill>
-              </a:defRPr>
-            </a:pPr>
-            <a:r>
-              <a:t>Dr. BELACEL Madani</a:t>
-            </a:r>
-            <a:br/>
-            <a:r>
-              <a:t>Maître de Conférences B</a:t>
-            </a:r>
-            <a:br/>
-            <a:r>
-              <a:t>Université de Mostaganem</a:t>
-            </a:r>
-            <a:br/>
-            <a:r>
-              <a:t>madani.belacel@univ-mosta.dz</a:t>
+                <a:latin typeface="Poppins"/>
+              </a:defRPr>
+            </a:pPr>
+            <a:r>
+              <a:rPr lang="fr-FR" sz="900">
+                <a:solidFill>
+                  <a:srgbClr val="9AA7B6"/>
+                </a:solidFill>
+                <a:latin typeface="Poppins"/>
+              </a:rPr>
+              <a:t>Université de Mostaganem — Dr. Madani BELACEL</a:t>
             </a:r>
           </a:p>
         </p:txBody>
@@ -4235,9 +4438,7 @@
   <p:cSld>
     <p:bg>
       <p:bgPr>
-        <a:solidFill>
-          <a:srgbClr val="FFFFFF"/>
-        </a:solidFill>
+        <a:solidFill>val="FFFFFF"/&gt;</a:solidFill>
         <a:effectLst/>
       </p:bgPr>
     </p:bg>
@@ -4272,9 +4473,7 @@
           <a:p>
             <a:pPr algn="l">
               <a:defRPr sz="2600" b="1">
-                <a:solidFill>
-                  <a:srgbClr val="1A5C33"/>
-                </a:solidFill>
+                <a:solidFill>val="006847"/&gt;</a:solidFill>
               </a:defRPr>
             </a:pPr>
             <a:r>
@@ -4310,9 +4509,7 @@
                 <a:spcPts val="600"/>
               </a:spcAft>
               <a:defRPr sz="1500">
-                <a:solidFill>
-                  <a:srgbClr val="222222"/>
-                </a:solidFill>
+                <a:solidFill>val="22344A"/&gt;</a:solidFill>
               </a:defRPr>
             </a:pPr>
             <a:r>
@@ -4325,9 +4522,7 @@
                 <a:spcPts val="600"/>
               </a:spcAft>
               <a:defRPr sz="1500">
-                <a:solidFill>
-                  <a:srgbClr val="222222"/>
-                </a:solidFill>
+                <a:solidFill>val="22344A"/&gt;</a:solidFill>
               </a:defRPr>
             </a:pPr>
             <a:r>
@@ -4340,13 +4535,52 @@
                 <a:spcPts val="600"/>
               </a:spcAft>
               <a:defRPr sz="1500">
+                <a:solidFill>val="22344A"/&gt;</a:solidFill>
+              </a:defRPr>
+            </a:pPr>
+            <a:r>
+              <a:t>• Évaluer les technologies</a:t>
+            </a:r>
+          </a:p>
+        </p:txBody>
+      </p:sp>
+      <p:sp>
+        <p:nvSpPr>
+          <p:cNvPr id="990001" name="Pied de page FLE"/>
+          <p:cNvSpPr>
+            <a:spLocks noGrp="1"/>
+          </p:cNvSpPr>
+          <p:nvPr/>
+        </p:nvSpPr>
+        <p:spPr>
+          <a:xfrm>
+            <a:off x="2971800" y="182880"/>
+            <a:ext cx="4572000" cy="274320"/>
+          </a:xfrm>
+          <a:prstGeom prst="rect">
+            <a:avLst/>
+          </a:prstGeom>
+        </p:spPr>
+        <p:txBody>
+          <a:bodyPr anchor="b"/>
+          <a:lstStyle/>
+          <a:p>
+            <a:pPr algn="r">
+              <a:defRPr sz="900">
                 <a:solidFill>
-                  <a:srgbClr val="222222"/>
+                  <a:srgbClr val="9AA7B6"/>
                 </a:solidFill>
-              </a:defRPr>
-            </a:pPr>
-            <a:r>
-              <a:t>• Évaluer les technologies</a:t>
+                <a:latin typeface="Poppins"/>
+              </a:defRPr>
+            </a:pPr>
+            <a:r>
+              <a:rPr lang="fr-FR" sz="900">
+                <a:solidFill>
+                  <a:srgbClr val="9AA7B6"/>
+                </a:solidFill>
+                <a:latin typeface="Poppins"/>
+              </a:rPr>
+              <a:t>Université de Mostaganem — Dr. Madani BELACEL</a:t>
             </a:r>
           </a:p>
         </p:txBody>
@@ -4364,9 +4598,7 @@
   <p:cSld>
     <p:bg>
       <p:bgPr>
-        <a:solidFill>
-          <a:srgbClr val="FFFFFF"/>
-        </a:solidFill>
+        <a:solidFill>val="FFFFFF"/&gt;</a:solidFill>
         <a:effectLst/>
       </p:bgPr>
     </p:bg>
@@ -4401,9 +4633,7 @@
           <a:p>
             <a:pPr algn="l">
               <a:defRPr sz="2600" b="1">
-                <a:solidFill>
-                  <a:srgbClr val="1A5C33"/>
-                </a:solidFill>
+                <a:solidFill>val="006847"/&gt;</a:solidFill>
               </a:defRPr>
             </a:pPr>
             <a:r>
@@ -4439,9 +4669,7 @@
                 <a:spcPts val="600"/>
               </a:spcAft>
               <a:defRPr sz="1600">
-                <a:solidFill>
-                  <a:srgbClr val="222222"/>
-                </a:solidFill>
+                <a:solidFill>val="22344A"/&gt;</a:solidFill>
               </a:defRPr>
             </a:pPr>
             <a:r>
@@ -4454,9 +4682,7 @@
                 <a:spcPts val="600"/>
               </a:spcAft>
               <a:defRPr sz="1600">
-                <a:solidFill>
-                  <a:srgbClr val="222222"/>
-                </a:solidFill>
+                <a:solidFill>val="22344A"/&gt;</a:solidFill>
               </a:defRPr>
             </a:pPr>
             <a:r>
@@ -4469,9 +4695,7 @@
                 <a:spcPts val="600"/>
               </a:spcAft>
               <a:defRPr sz="1600">
-                <a:solidFill>
-                  <a:srgbClr val="222222"/>
-                </a:solidFill>
+                <a:solidFill>val="22344A"/&gt;</a:solidFill>
               </a:defRPr>
             </a:pPr>
             <a:r>
@@ -4484,9 +4708,7 @@
                 <a:spcPts val="600"/>
               </a:spcAft>
               <a:defRPr sz="1600">
-                <a:solidFill>
-                  <a:srgbClr val="222222"/>
-                </a:solidFill>
+                <a:solidFill>val="22344A"/&gt;</a:solidFill>
               </a:defRPr>
             </a:pPr>
             <a:r>
@@ -4499,9 +4721,7 @@
                 <a:spcPts val="600"/>
               </a:spcAft>
               <a:defRPr sz="1600">
-                <a:solidFill>
-                  <a:srgbClr val="222222"/>
-                </a:solidFill>
+                <a:solidFill>val="22344A"/&gt;</a:solidFill>
               </a:defRPr>
             </a:pPr>
             <a:r>
@@ -4514,9 +4734,7 @@
                 <a:spcPts val="600"/>
               </a:spcAft>
               <a:defRPr sz="1600">
-                <a:solidFill>
-                  <a:srgbClr val="222222"/>
-                </a:solidFill>
+                <a:solidFill>val="22344A"/&gt;</a:solidFill>
               </a:defRPr>
             </a:pPr>
             <a:r>
@@ -4529,9 +4747,7 @@
                 <a:spcPts val="600"/>
               </a:spcAft>
               <a:defRPr sz="1600">
-                <a:solidFill>
-                  <a:srgbClr val="222222"/>
-                </a:solidFill>
+                <a:solidFill>val="22344A"/&gt;</a:solidFill>
               </a:defRPr>
             </a:pPr>
             <a:r>
@@ -4544,9 +4760,7 @@
                 <a:spcPts val="600"/>
               </a:spcAft>
               <a:defRPr sz="1600">
-                <a:solidFill>
-                  <a:srgbClr val="222222"/>
-                </a:solidFill>
+                <a:solidFill>val="22344A"/&gt;</a:solidFill>
               </a:defRPr>
             </a:pPr>
             <a:r>
@@ -4559,9 +4773,7 @@
                 <a:spcPts val="600"/>
               </a:spcAft>
               <a:defRPr sz="1600">
-                <a:solidFill>
-                  <a:srgbClr val="222222"/>
-                </a:solidFill>
+                <a:solidFill>val="22344A"/&gt;</a:solidFill>
               </a:defRPr>
             </a:pPr>
             <a:r>
@@ -4574,13 +4786,52 @@
                 <a:spcPts val="600"/>
               </a:spcAft>
               <a:defRPr sz="1600">
+                <a:solidFill>val="22344A"/&gt;</a:solidFill>
+              </a:defRPr>
+            </a:pPr>
+            <a:r>
+              <a:t>• 3. von Neumann model(15 min)</a:t>
+            </a:r>
+          </a:p>
+        </p:txBody>
+      </p:sp>
+      <p:sp>
+        <p:nvSpPr>
+          <p:cNvPr id="990001" name="Pied de page FLE"/>
+          <p:cNvSpPr>
+            <a:spLocks noGrp="1"/>
+          </p:cNvSpPr>
+          <p:nvPr/>
+        </p:nvSpPr>
+        <p:spPr>
+          <a:xfrm>
+            <a:off x="2971800" y="182880"/>
+            <a:ext cx="4572000" cy="274320"/>
+          </a:xfrm>
+          <a:prstGeom prst="rect">
+            <a:avLst/>
+          </a:prstGeom>
+        </p:spPr>
+        <p:txBody>
+          <a:bodyPr anchor="b"/>
+          <a:lstStyle/>
+          <a:p>
+            <a:pPr algn="r">
+              <a:defRPr sz="900">
                 <a:solidFill>
-                  <a:srgbClr val="222222"/>
+                  <a:srgbClr val="9AA7B6"/>
                 </a:solidFill>
-              </a:defRPr>
-            </a:pPr>
-            <a:r>
-              <a:t>• 3. von Neumann model(15 min)</a:t>
+                <a:latin typeface="Poppins"/>
+              </a:defRPr>
+            </a:pPr>
+            <a:r>
+              <a:rPr lang="fr-FR" sz="900">
+                <a:solidFill>
+                  <a:srgbClr val="9AA7B6"/>
+                </a:solidFill>
+                <a:latin typeface="Poppins"/>
+              </a:rPr>
+              <a:t>Université de Mostaganem — Dr. Madani BELACEL</a:t>
             </a:r>
           </a:p>
         </p:txBody>
@@ -4598,9 +4849,7 @@
   <p:cSld>
     <p:bg>
       <p:bgPr>
-        <a:solidFill>
-          <a:srgbClr val="FFFFFF"/>
-        </a:solidFill>
+        <a:solidFill>val="FFFFFF"/&gt;</a:solidFill>
         <a:effectLst/>
       </p:bgPr>
     </p:bg>
@@ -4625,9 +4874,7 @@
           <a:prstGeom prst="rect">
             <a:avLst/>
           </a:prstGeom>
-          <a:solidFill>
-            <a:srgbClr val="2C6E49"/>
-          </a:solidFill>
+          <a:solidFill>val="00875B"/&gt;</a:solidFill>
           <a:ln>
             <a:noFill/>
           </a:ln>
@@ -4678,9 +4925,7 @@
           <a:p>
             <a:pPr algn="l">
               <a:defRPr sz="2200" b="1">
-                <a:solidFill>
-                  <a:srgbClr val="1A5C33"/>
-                </a:solidFill>
+                <a:solidFill>val="006847"/&gt;</a:solidFill>
               </a:defRPr>
             </a:pPr>
             <a:r>
@@ -4716,9 +4961,7 @@
                 <a:spcPts val="600"/>
               </a:spcAft>
               <a:defRPr sz="1400">
-                <a:solidFill>
-                  <a:srgbClr val="222222"/>
-                </a:solidFill>
+                <a:solidFill>val="22344A"/&gt;</a:solidFill>
               </a:defRPr>
             </a:pPr>
             <a:r>
@@ -4739,9 +4982,7 @@
                 <a:spcPts val="600"/>
               </a:spcAft>
               <a:defRPr sz="1400">
-                <a:solidFill>
-                  <a:srgbClr val="222222"/>
-                </a:solidFill>
+                <a:solidFill>val="22344A"/&gt;</a:solidFill>
               </a:defRPr>
             </a:pPr>
             <a:r>
@@ -4762,17 +5003,56 @@
                 <a:spcPts val="600"/>
               </a:spcAft>
               <a:defRPr sz="1400">
+                <a:solidFill>val="22344A"/&gt;</a:solidFill>
+              </a:defRPr>
+            </a:pPr>
+            <a:r>
+              <a:t>• Attitudes:- Adopt a digital mediator posture in the classroom</a:t>
+            </a:r>
+            <a:br/>
+            <a:r>
+              <a:t>- Develop critical thinking about tools and resources</a:t>
+            </a:r>
+          </a:p>
+        </p:txBody>
+      </p:sp>
+      <p:sp>
+        <p:nvSpPr>
+          <p:cNvPr id="990001" name="Pied de page FLE"/>
+          <p:cNvSpPr>
+            <a:spLocks noGrp="1"/>
+          </p:cNvSpPr>
+          <p:nvPr/>
+        </p:nvSpPr>
+        <p:spPr>
+          <a:xfrm>
+            <a:off x="-228600" y="6400800"/>
+            <a:ext cx="109728" cy="274320"/>
+          </a:xfrm>
+          <a:prstGeom prst="rect">
+            <a:avLst/>
+          </a:prstGeom>
+        </p:spPr>
+        <p:txBody>
+          <a:bodyPr anchor="b"/>
+          <a:lstStyle/>
+          <a:p>
+            <a:pPr algn="r">
+              <a:defRPr sz="900">
                 <a:solidFill>
-                  <a:srgbClr val="222222"/>
+                  <a:srgbClr val="9AA7B6"/>
                 </a:solidFill>
-              </a:defRPr>
-            </a:pPr>
-            <a:r>
-              <a:t>• Attitudes:- Adopt a digital mediator posture in the classroom</a:t>
-            </a:r>
-            <a:br/>
-            <a:r>
-              <a:t>- Develop critical thinking about tools and resources</a:t>
+                <a:latin typeface="Poppins"/>
+              </a:defRPr>
+            </a:pPr>
+            <a:r>
+              <a:rPr lang="fr-FR" sz="900">
+                <a:solidFill>
+                  <a:srgbClr val="9AA7B6"/>
+                </a:solidFill>
+                <a:latin typeface="Poppins"/>
+              </a:rPr>
+              <a:t>Université de Mostaganem — Dr. Madani BELACEL</a:t>
             </a:r>
           </a:p>
         </p:txBody>
@@ -4790,9 +5070,7 @@
   <p:cSld>
     <p:bg>
       <p:bgPr>
-        <a:solidFill>
-          <a:srgbClr val="FFFFFF"/>
-        </a:solidFill>
+        <a:solidFill>val="FFFFFF"/&gt;</a:solidFill>
         <a:effectLst/>
       </p:bgPr>
     </p:bg>
@@ -4817,9 +5095,7 @@
           <a:prstGeom prst="rect">
             <a:avLst/>
           </a:prstGeom>
-          <a:solidFill>
-            <a:srgbClr val="2C6E49"/>
-          </a:solidFill>
+          <a:solidFill>val="00875B"/&gt;</a:solidFill>
           <a:ln>
             <a:noFill/>
           </a:ln>
@@ -4870,9 +5146,7 @@
           <a:p>
             <a:pPr algn="l">
               <a:defRPr sz="2200" b="1">
-                <a:solidFill>
-                  <a:srgbClr val="1A5C33"/>
-                </a:solidFill>
+                <a:solidFill>val="006847"/&gt;</a:solidFill>
               </a:defRPr>
             </a:pPr>
             <a:r>
@@ -4908,9 +5182,7 @@
                 <a:spcPts val="600"/>
               </a:spcAft>
               <a:defRPr sz="1400">
-                <a:solidFill>
-                  <a:srgbClr val="222222"/>
-                </a:solidFill>
+                <a:solidFill>val="22344A"/&gt;</a:solidFill>
               </a:defRPr>
             </a:pPr>
             <a:r>
@@ -4923,9 +5195,7 @@
                 <a:spcPts val="600"/>
               </a:spcAft>
               <a:defRPr sz="1400">
-                <a:solidFill>
-                  <a:srgbClr val="222222"/>
-                </a:solidFill>
+                <a:solidFill>val="22344A"/&gt;</a:solidFill>
               </a:defRPr>
             </a:pPr>
             <a:r>
@@ -4938,13 +5208,52 @@
                 <a:spcPts val="600"/>
               </a:spcAft>
               <a:defRPr sz="1400">
+                <a:solidFill>val="22344A"/&gt;</a:solidFill>
+              </a:defRPr>
+            </a:pPr>
+            <a:r>
+              <a:t>• For the future teacher:ICT are not just personal tools butpedagogical instrumentsto integrate into teaching practice.</a:t>
+            </a:r>
+          </a:p>
+        </p:txBody>
+      </p:sp>
+      <p:sp>
+        <p:nvSpPr>
+          <p:cNvPr id="990001" name="Pied de page FLE"/>
+          <p:cNvSpPr>
+            <a:spLocks noGrp="1"/>
+          </p:cNvSpPr>
+          <p:nvPr/>
+        </p:nvSpPr>
+        <p:spPr>
+          <a:xfrm>
+            <a:off x="-228600" y="6400800"/>
+            <a:ext cx="109728" cy="274320"/>
+          </a:xfrm>
+          <a:prstGeom prst="rect">
+            <a:avLst/>
+          </a:prstGeom>
+        </p:spPr>
+        <p:txBody>
+          <a:bodyPr anchor="b"/>
+          <a:lstStyle/>
+          <a:p>
+            <a:pPr algn="r">
+              <a:defRPr sz="900">
                 <a:solidFill>
-                  <a:srgbClr val="222222"/>
+                  <a:srgbClr val="9AA7B6"/>
                 </a:solidFill>
-              </a:defRPr>
-            </a:pPr>
-            <a:r>
-              <a:t>• For the future teacher:ICT are not just personal tools butpedagogical instrumentsto integrate into teaching practice.</a:t>
+                <a:latin typeface="Poppins"/>
+              </a:defRPr>
+            </a:pPr>
+            <a:r>
+              <a:rPr lang="fr-FR" sz="900">
+                <a:solidFill>
+                  <a:srgbClr val="9AA7B6"/>
+                </a:solidFill>
+                <a:latin typeface="Poppins"/>
+              </a:rPr>
+              <a:t>Université de Mostaganem — Dr. Madani BELACEL</a:t>
             </a:r>
           </a:p>
         </p:txBody>
@@ -4962,9 +5271,7 @@
   <p:cSld>
     <p:bg>
       <p:bgPr>
-        <a:solidFill>
-          <a:srgbClr val="FFFFFF"/>
-        </a:solidFill>
+        <a:solidFill>val="FFFFFF"/&gt;</a:solidFill>
         <a:effectLst/>
       </p:bgPr>
     </p:bg>
@@ -4989,9 +5296,7 @@
           <a:prstGeom prst="rect">
             <a:avLst/>
           </a:prstGeom>
-          <a:solidFill>
-            <a:srgbClr val="2C6E49"/>
-          </a:solidFill>
+          <a:solidFill>val="00875B"/&gt;</a:solidFill>
           <a:ln>
             <a:noFill/>
           </a:ln>
@@ -5042,9 +5347,7 @@
           <a:p>
             <a:pPr algn="l">
               <a:defRPr sz="2200" b="1">
-                <a:solidFill>
-                  <a:srgbClr val="1A5C33"/>
-                </a:solidFill>
+                <a:solidFill>val="006847"/&gt;</a:solidFill>
               </a:defRPr>
             </a:pPr>
             <a:r>
@@ -5080,9 +5383,7 @@
                 <a:spcPts val="600"/>
               </a:spcAft>
               <a:defRPr sz="1400">
-                <a:solidFill>
-                  <a:srgbClr val="222222"/>
-                </a:solidFill>
+                <a:solidFill>val="22344A"/&gt;</a:solidFill>
               </a:defRPr>
             </a:pPr>
             <a:r>
@@ -5107,25 +5408,64 @@
                 <a:spcPts val="600"/>
               </a:spcAft>
               <a:defRPr sz="1400">
+                <a:solidFill>val="22344A"/&gt;</a:solidFill>
+              </a:defRPr>
+            </a:pPr>
+            <a:r>
+              <a:t>• Application areas:- Listening: podcasts, audio recording</a:t>
+            </a:r>
+            <a:br/>
+            <a:r>
+              <a:t>- Writing: blogs, wikis, collaborative editing</a:t>
+            </a:r>
+            <a:br/>
+            <a:r>
+              <a:t>- Interaction: videoconferencing with partner classes</a:t>
+            </a:r>
+            <a:br/>
+            <a:r>
+              <a:t>- Grammar/vocabulary: interactive exercises, quizzes</a:t>
+            </a:r>
+          </a:p>
+        </p:txBody>
+      </p:sp>
+      <p:sp>
+        <p:nvSpPr>
+          <p:cNvPr id="990001" name="Pied de page FLE"/>
+          <p:cNvSpPr>
+            <a:spLocks noGrp="1"/>
+          </p:cNvSpPr>
+          <p:nvPr/>
+        </p:nvSpPr>
+        <p:spPr>
+          <a:xfrm>
+            <a:off x="-228600" y="6400800"/>
+            <a:ext cx="109728" cy="274320"/>
+          </a:xfrm>
+          <a:prstGeom prst="rect">
+            <a:avLst/>
+          </a:prstGeom>
+        </p:spPr>
+        <p:txBody>
+          <a:bodyPr anchor="b"/>
+          <a:lstStyle/>
+          <a:p>
+            <a:pPr algn="r">
+              <a:defRPr sz="900">
                 <a:solidFill>
-                  <a:srgbClr val="222222"/>
+                  <a:srgbClr val="9AA7B6"/>
                 </a:solidFill>
-              </a:defRPr>
-            </a:pPr>
-            <a:r>
-              <a:t>• Application areas:- Listening: podcasts, audio recording</a:t>
-            </a:r>
-            <a:br/>
-            <a:r>
-              <a:t>- Writing: blogs, wikis, collaborative editing</a:t>
-            </a:r>
-            <a:br/>
-            <a:r>
-              <a:t>- Interaction: videoconferencing with partner classes</a:t>
-            </a:r>
-            <a:br/>
-            <a:r>
-              <a:t>- Grammar/vocabulary: interactive exercises, quizzes</a:t>
+                <a:latin typeface="Poppins"/>
+              </a:defRPr>
+            </a:pPr>
+            <a:r>
+              <a:rPr lang="fr-FR" sz="900">
+                <a:solidFill>
+                  <a:srgbClr val="9AA7B6"/>
+                </a:solidFill>
+                <a:latin typeface="Poppins"/>
+              </a:rPr>
+              <a:t>Université de Mostaganem — Dr. Madani BELACEL</a:t>
             </a:r>
           </a:p>
         </p:txBody>
@@ -5143,9 +5483,7 @@
   <p:cSld>
     <p:bg>
       <p:bgPr>
-        <a:solidFill>
-          <a:srgbClr val="FFFFFF"/>
-        </a:solidFill>
+        <a:solidFill>val="FFFFFF"/&gt;</a:solidFill>
         <a:effectLst/>
       </p:bgPr>
     </p:bg>
@@ -5170,9 +5508,7 @@
           <a:prstGeom prst="rect">
             <a:avLst/>
           </a:prstGeom>
-          <a:solidFill>
-            <a:srgbClr val="2C6E49"/>
-          </a:solidFill>
+          <a:solidFill>val="00875B"/&gt;</a:solidFill>
           <a:ln>
             <a:noFill/>
           </a:ln>
@@ -5223,9 +5559,7 @@
           <a:p>
             <a:pPr algn="l">
               <a:defRPr sz="2200" b="1">
-                <a:solidFill>
-                  <a:srgbClr val="1A5C33"/>
-                </a:solidFill>
+                <a:solidFill>val="006847"/&gt;</a:solidFill>
               </a:defRPr>
             </a:pPr>
             <a:r>
@@ -5261,9 +5595,7 @@
                 <a:spcPts val="600"/>
               </a:spcAft>
               <a:defRPr sz="1400">
-                <a:solidFill>
-                  <a:srgbClr val="222222"/>
-                </a:solidFill>
+                <a:solidFill>val="22344A"/&gt;</a:solidFill>
               </a:defRPr>
             </a:pPr>
             <a:r>
@@ -5276,9 +5608,7 @@
                 <a:spcPts val="600"/>
               </a:spcAft>
               <a:defRPr sz="1400">
-                <a:solidFill>
-                  <a:srgbClr val="222222"/>
-                </a:solidFill>
+                <a:solidFill>val="22344A"/&gt;</a:solidFill>
               </a:defRPr>
             </a:pPr>
             <a:r>
@@ -5291,9 +5621,7 @@
                 <a:spcPts val="600"/>
               </a:spcAft>
               <a:defRPr sz="1400">
-                <a:solidFill>
-                  <a:srgbClr val="222222"/>
-                </a:solidFill>
+                <a:solidFill>val="22344A"/&gt;</a:solidFill>
               </a:defRPr>
             </a:pPr>
             <a:r>
@@ -5306,9 +5634,7 @@
                 <a:spcPts val="600"/>
               </a:spcAft>
               <a:defRPr sz="1400">
-                <a:solidFill>
-                  <a:srgbClr val="222222"/>
-                </a:solidFill>
+                <a:solidFill>val="22344A"/&gt;</a:solidFill>
               </a:defRPr>
             </a:pPr>
             <a:r>
@@ -5321,13 +5647,52 @@
                 <a:spcPts val="600"/>
               </a:spcAft>
               <a:defRPr sz="1400">
+                <a:solidFill>val="22344A"/&gt;</a:solidFill>
+              </a:defRPr>
+            </a:pPr>
+            <a:r>
+              <a:t>• Develop professional monitoring</a:t>
+            </a:r>
+          </a:p>
+        </p:txBody>
+      </p:sp>
+      <p:sp>
+        <p:nvSpPr>
+          <p:cNvPr id="990001" name="Pied de page FLE"/>
+          <p:cNvSpPr>
+            <a:spLocks noGrp="1"/>
+          </p:cNvSpPr>
+          <p:nvPr/>
+        </p:nvSpPr>
+        <p:spPr>
+          <a:xfrm>
+            <a:off x="-228600" y="6400800"/>
+            <a:ext cx="109728" cy="274320"/>
+          </a:xfrm>
+          <a:prstGeom prst="rect">
+            <a:avLst/>
+          </a:prstGeom>
+        </p:spPr>
+        <p:txBody>
+          <a:bodyPr anchor="b"/>
+          <a:lstStyle/>
+          <a:p>
+            <a:pPr algn="r">
+              <a:defRPr sz="900">
                 <a:solidFill>
-                  <a:srgbClr val="222222"/>
+                  <a:srgbClr val="9AA7B6"/>
                 </a:solidFill>
-              </a:defRPr>
-            </a:pPr>
-            <a:r>
-              <a:t>• Develop professional monitoring</a:t>
+                <a:latin typeface="Poppins"/>
+              </a:defRPr>
+            </a:pPr>
+            <a:r>
+              <a:rPr lang="fr-FR" sz="900">
+                <a:solidFill>
+                  <a:srgbClr val="9AA7B6"/>
+                </a:solidFill>
+                <a:latin typeface="Poppins"/>
+              </a:rPr>
+              <a:t>Université de Mostaganem — Dr. Madani BELACEL</a:t>
             </a:r>
           </a:p>
         </p:txBody>
@@ -5345,9 +5710,7 @@
   <p:cSld>
     <p:bg>
       <p:bgPr>
-        <a:solidFill>
-          <a:srgbClr val="FFFFFF"/>
-        </a:solidFill>
+        <a:solidFill>val="FFFFFF"/&gt;</a:solidFill>
         <a:effectLst/>
       </p:bgPr>
     </p:bg>
@@ -5372,9 +5735,7 @@
           <a:prstGeom prst="rect">
             <a:avLst/>
           </a:prstGeom>
-          <a:solidFill>
-            <a:srgbClr val="2C6E49"/>
-          </a:solidFill>
+          <a:solidFill>val="00875B"/&gt;</a:solidFill>
           <a:ln>
             <a:noFill/>
           </a:ln>
@@ -5425,9 +5786,7 @@
           <a:p>
             <a:pPr algn="l">
               <a:defRPr sz="2200" b="1">
-                <a:solidFill>
-                  <a:srgbClr val="1A5C33"/>
-                </a:solidFill>
+                <a:solidFill>val="006847"/&gt;</a:solidFill>
               </a:defRPr>
             </a:pPr>
             <a:r>
@@ -5463,9 +5822,7 @@
                 <a:spcPts val="600"/>
               </a:spcAft>
               <a:defRPr sz="1400">
-                <a:solidFill>
-                  <a:srgbClr val="222222"/>
-                </a:solidFill>
+                <a:solidFill>val="22344A"/&gt;</a:solidFill>
               </a:defRPr>
             </a:pPr>
             <a:r>
@@ -5478,9 +5835,7 @@
                 <a:spcPts val="600"/>
               </a:spcAft>
               <a:defRPr sz="1400">
-                <a:solidFill>
-                  <a:srgbClr val="222222"/>
-                </a:solidFill>
+                <a:solidFill>val="22344A"/&gt;</a:solidFill>
               </a:defRPr>
             </a:pPr>
             <a:r>
@@ -5493,9 +5848,7 @@
                 <a:spcPts val="600"/>
               </a:spcAft>
               <a:defRPr sz="1400">
-                <a:solidFill>
-                  <a:srgbClr val="222222"/>
-                </a:solidFill>
+                <a:solidFill>val="22344A"/&gt;</a:solidFill>
               </a:defRPr>
             </a:pPr>
             <a:r>
@@ -5508,13 +5861,52 @@
                 <a:spcPts val="600"/>
               </a:spcAft>
               <a:defRPr sz="1400">
+                <a:solidFill>val="22344A"/&gt;</a:solidFill>
+              </a:defRPr>
+            </a:pPr>
+            <a:r>
+              <a:t>• Digital identity:the teacher as a role model</a:t>
+            </a:r>
+          </a:p>
+        </p:txBody>
+      </p:sp>
+      <p:sp>
+        <p:nvSpPr>
+          <p:cNvPr id="990001" name="Pied de page FLE"/>
+          <p:cNvSpPr>
+            <a:spLocks noGrp="1"/>
+          </p:cNvSpPr>
+          <p:nvPr/>
+        </p:nvSpPr>
+        <p:spPr>
+          <a:xfrm>
+            <a:off x="-228600" y="6400800"/>
+            <a:ext cx="109728" cy="274320"/>
+          </a:xfrm>
+          <a:prstGeom prst="rect">
+            <a:avLst/>
+          </a:prstGeom>
+        </p:spPr>
+        <p:txBody>
+          <a:bodyPr anchor="b"/>
+          <a:lstStyle/>
+          <a:p>
+            <a:pPr algn="r">
+              <a:defRPr sz="900">
                 <a:solidFill>
-                  <a:srgbClr val="222222"/>
+                  <a:srgbClr val="9AA7B6"/>
                 </a:solidFill>
-              </a:defRPr>
-            </a:pPr>
-            <a:r>
-              <a:t>• Digital identity:the teacher as a role model</a:t>
+                <a:latin typeface="Poppins"/>
+              </a:defRPr>
+            </a:pPr>
+            <a:r>
+              <a:rPr lang="fr-FR" sz="900">
+                <a:solidFill>
+                  <a:srgbClr val="9AA7B6"/>
+                </a:solidFill>
+                <a:latin typeface="Poppins"/>
+              </a:rPr>
+              <a:t>Université de Mostaganem — Dr. Madani BELACEL</a:t>
             </a:r>
           </a:p>
         </p:txBody>
@@ -5532,9 +5924,7 @@
   <p:cSld>
     <p:bg>
       <p:bgPr>
-        <a:solidFill>
-          <a:srgbClr val="FFFFFF"/>
-        </a:solidFill>
+        <a:solidFill>val="FFFFFF"/&gt;</a:solidFill>
         <a:effectLst/>
       </p:bgPr>
     </p:bg>
@@ -5559,9 +5949,7 @@
           <a:prstGeom prst="rect">
             <a:avLst/>
           </a:prstGeom>
-          <a:solidFill>
-            <a:srgbClr val="2C6E49"/>
-          </a:solidFill>
+          <a:solidFill>val="00875B"/&gt;</a:solidFill>
           <a:ln>
             <a:noFill/>
           </a:ln>
@@ -5612,9 +6000,7 @@
           <a:p>
             <a:pPr algn="l">
               <a:defRPr sz="2200" b="1">
-                <a:solidFill>
-                  <a:srgbClr val="1A5C33"/>
-                </a:solidFill>
+                <a:solidFill>val="006847"/&gt;</a:solidFill>
               </a:defRPr>
             </a:pPr>
             <a:r>
@@ -5650,9 +6036,7 @@
                 <a:spcPts val="600"/>
               </a:spcAft>
               <a:defRPr sz="1400">
-                <a:solidFill>
-                  <a:srgbClr val="222222"/>
-                </a:solidFill>
+                <a:solidFill>val="22344A"/&gt;</a:solidFill>
               </a:defRPr>
             </a:pPr>
             <a:r>
@@ -5665,9 +6049,7 @@
                 <a:spcPts val="600"/>
               </a:spcAft>
               <a:defRPr sz="1400">
-                <a:solidFill>
-                  <a:srgbClr val="222222"/>
-                </a:solidFill>
+                <a:solidFill>val="22344A"/&gt;</a:solidFill>
               </a:defRPr>
             </a:pPr>
             <a:r>
@@ -5680,9 +6062,7 @@
                 <a:spcPts val="600"/>
               </a:spcAft>
               <a:defRPr sz="1400">
-                <a:solidFill>
-                  <a:srgbClr val="222222"/>
-                </a:solidFill>
+                <a:solidFill>val="22344A"/&gt;</a:solidFill>
               </a:defRPr>
             </a:pPr>
             <a:r>
@@ -5695,13 +6075,52 @@
                 <a:spcPts val="600"/>
               </a:spcAft>
               <a:defRPr sz="1400">
+                <a:solidFill>val="22344A"/&gt;</a:solidFill>
+              </a:defRPr>
+            </a:pPr>
+            <a:r>
+              <a:t>• TD 01(1h30) — analyzing ICT tools for the classroom.</a:t>
+            </a:r>
+          </a:p>
+        </p:txBody>
+      </p:sp>
+      <p:sp>
+        <p:nvSpPr>
+          <p:cNvPr id="990001" name="Pied de page FLE"/>
+          <p:cNvSpPr>
+            <a:spLocks noGrp="1"/>
+          </p:cNvSpPr>
+          <p:nvPr/>
+        </p:nvSpPr>
+        <p:spPr>
+          <a:xfrm>
+            <a:off x="-228600" y="6400800"/>
+            <a:ext cx="109728" cy="274320"/>
+          </a:xfrm>
+          <a:prstGeom prst="rect">
+            <a:avLst/>
+          </a:prstGeom>
+        </p:spPr>
+        <p:txBody>
+          <a:bodyPr anchor="b"/>
+          <a:lstStyle/>
+          <a:p>
+            <a:pPr algn="r">
+              <a:defRPr sz="900">
                 <a:solidFill>
-                  <a:srgbClr val="222222"/>
+                  <a:srgbClr val="9AA7B6"/>
                 </a:solidFill>
-              </a:defRPr>
-            </a:pPr>
-            <a:r>
-              <a:t>• TD 01(1h30) — analyzing ICT tools for the classroom.</a:t>
+                <a:latin typeface="Poppins"/>
+              </a:defRPr>
+            </a:pPr>
+            <a:r>
+              <a:rPr lang="fr-FR" sz="900">
+                <a:solidFill>
+                  <a:srgbClr val="9AA7B6"/>
+                </a:solidFill>
+                <a:latin typeface="Poppins"/>
+              </a:rPr>
+              <a:t>Université de Mostaganem — Dr. Madani BELACEL</a:t>
             </a:r>
           </a:p>
         </p:txBody>
@@ -5757,7 +6176,7 @@
     </a:clrScheme>
     <a:fontScheme name="Office">
       <a:majorFont>
-        <a:latin typeface="Calibri"/>
+        <a:latin typeface="Poppins"/>
         <a:ea typeface=""/>
         <a:cs typeface=""/>
         <a:font script="Jpan" typeface="ＭＳ Ｐゴシック"/>
@@ -5792,7 +6211,7 @@
         <a:font script="Geor" typeface="Sylfaen"/>
       </a:majorFont>
       <a:minorFont>
-        <a:latin typeface="Calibri"/>
+        <a:latin typeface="Poppins"/>
         <a:ea typeface=""/>
         <a:cs typeface=""/>
         <a:font script="Jpan" typeface="ＭＳ Ｐゴシック"/>
